--- a/docs/session_results_2026-08-04.pptx
+++ b/docs/session_results_2026-08-04.pptx
@@ -11,6 +11,9 @@
     <p:sldId id="259" r:id="rId10"/>
     <p:sldId id="260" r:id="rId11"/>
     <p:sldId id="261" r:id="rId12"/>
+    <p:sldId id="262" r:id="rId13"/>
+    <p:sldId id="263" r:id="rId14"/>
+    <p:sldId id="264" r:id="rId15"/>
   </p:sldIdLst>
   <p:sldSz cx="12191695" cy="6858000" type="screen4x3"/>
   <p:notesSz cx="6858000" cy="9144000"/>
@@ -4761,6 +4764,777 @@
             </a:pPr>
             <a:r>
               <a:t>•  → Not yet distinguished: a real dynamics change from the rework, vs. this method's lower sample rate (≈180Hz VCP relay vs. the original's camera-direct rate) making the settling-time criterion more sensitive to a single noisy tail sample.</a:t>
+            </a:r>
+          </a:p>
+        </p:txBody>
+      </p:sp>
+    </p:spTree>
+  </p:cSld>
+  <p:clrMapOvr>
+    <a:masterClrMapping/>
+  </p:clrMapOvr>
+</p:sld>
+</file>
+
+<file path=ppt/slides/slide7.xml><?xml version="1.0" encoding="utf-8"?>
+<p:sld xmlns:a="http://schemas.openxmlformats.org/drawingml/2006/main" xmlns:p="http://schemas.openxmlformats.org/presentationml/2006/main" xmlns:r="http://schemas.openxmlformats.org/officeDocument/2006/relationships">
+  <p:cSld>
+    <p:spTree>
+      <p:nvGrpSpPr>
+        <p:cNvPr id="1" name=""/>
+        <p:cNvGrpSpPr/>
+        <p:nvPr/>
+      </p:nvGrpSpPr>
+      <p:grpSpPr/>
+      <p:sp>
+        <p:nvSpPr>
+          <p:cNvPr id="2" name="TextBox 1"/>
+          <p:cNvSpPr txBox="1"/>
+          <p:nvPr/>
+        </p:nvSpPr>
+        <p:spPr>
+          <a:xfrm>
+            <a:off x="548640" y="365760"/>
+            <a:ext cx="11064240" cy="640080"/>
+          </a:xfrm>
+          <a:prstGeom prst="rect">
+            <a:avLst/>
+          </a:prstGeom>
+          <a:noFill/>
+        </p:spPr>
+        <p:txBody>
+          <a:bodyPr wrap="square">
+            <a:spAutoFit/>
+          </a:bodyPr>
+          <a:lstStyle/>
+          <a:p>
+            <a:pPr>
+              <a:defRPr sz="2800" b="1">
+                <a:solidFill>
+                  <a:srgbClr val="0B0B0B"/>
+                </a:solidFill>
+              </a:defRPr>
+            </a:pPr>
+            <a:r>
+              <a:t>Sine tracking — methodology</a:t>
+            </a:r>
+          </a:p>
+        </p:txBody>
+      </p:sp>
+      <p:sp>
+        <p:nvSpPr>
+          <p:cNvPr id="3" name="TextBox 2"/>
+          <p:cNvSpPr txBox="1"/>
+          <p:nvPr/>
+        </p:nvSpPr>
+        <p:spPr>
+          <a:xfrm>
+            <a:off x="731520" y="1554480"/>
+            <a:ext cx="10698480" cy="4572000"/>
+          </a:xfrm>
+          <a:prstGeom prst="rect">
+            <a:avLst/>
+          </a:prstGeom>
+          <a:noFill/>
+        </p:spPr>
+        <p:txBody>
+          <a:bodyPr wrap="square">
+            <a:spAutoFit/>
+          </a:bodyPr>
+          <a:lstStyle/>
+          <a:p>
+            <a:pPr>
+              <a:spcAft>
+                <a:spcPts val="1000"/>
+              </a:spcAft>
+              <a:defRPr sz="1500">
+                <a:solidFill>
+                  <a:srgbClr val="0B0B0B"/>
+                </a:solidFill>
+              </a:defRPr>
+            </a:pPr>
+            <a:r>
+              <a:t>•  Complements the step-response tests: instead of a one-off transient, commands a continuous sine on axis X (±200 DAC counts around 2000) and measures how well the pixel position follows it — directly relevant to rejecting the project's actual 10-20Hz disturbance band.</a:t>
+            </a:r>
+          </a:p>
+          <a:p>
+            <a:pPr>
+              <a:spcAft>
+                <a:spcPts val="1000"/>
+              </a:spcAft>
+              <a:defRPr sz="1500">
+                <a:solidFill>
+                  <a:srgbClr val="0B0B0B"/>
+                </a:solidFill>
+              </a:defRPr>
+            </a:pPr>
+            <a:r>
+              <a:t>•  Same laptop-only VCP approach as the step tests: set_x commands paced at 200Hz to trace the sine, measured position sourced from the Nucleo's per-packet I2C-relay print, no Pi access needed.</a:t>
+            </a:r>
+          </a:p>
+          <a:p>
+            <a:pPr>
+              <a:spcAft>
+                <a:spcPts val="1000"/>
+              </a:spcAft>
+              <a:defRPr sz="1500">
+                <a:solidFill>
+                  <a:srgbClr val="0B0B0B"/>
+                </a:solidFill>
+              </a:defRPr>
+            </a:pPr>
+            <a:r>
+              <a:t>•  Frequency is known exactly (we generate the command), so fitting the measured trace to A·sin(ωt)+B·cos(ωt)+C is a linear least-squares problem — no iterative fit needed. First full commanded cycle is excluded from each fit to avoid a startup transient (visible in the 1Hz run) contaminating the result.</a:t>
+            </a:r>
+          </a:p>
+          <a:p>
+            <a:pPr>
+              <a:spcAft>
+                <a:spcPts val="1000"/>
+              </a:spcAft>
+              <a:defRPr sz="1500">
+                <a:solidFill>
+                  <a:srgbClr val="0B0B0B"/>
+                </a:solidFill>
+              </a:defRPr>
+            </a:pPr>
+            <a:r>
+              <a:t>•  IMPORTANT CAVEAT: this test's measurement path (I2C → Nucleo print → USB VCP → Python read) is NOT the path a real closed-loop controller would use — a future PID running on the Nucleo reads relayed telemetry directly at ISR level, with none of this print/USB/Python overhead. The fitted phase-lag numbers here likely include real actuator lag AND this test method's own added latency, not yet separated. Treat the SHAPE of the match as trustworthy; treat the exact lag numbers as an upper bound, not a clean actuator-only measurement.</a:t>
+            </a:r>
+          </a:p>
+        </p:txBody>
+      </p:sp>
+    </p:spTree>
+  </p:cSld>
+  <p:clrMapOvr>
+    <a:masterClrMapping/>
+  </p:clrMapOvr>
+</p:sld>
+</file>
+
+<file path=ppt/slides/slide8.xml><?xml version="1.0" encoding="utf-8"?>
+<p:sld xmlns:a="http://schemas.openxmlformats.org/drawingml/2006/main" xmlns:p="http://schemas.openxmlformats.org/presentationml/2006/main" xmlns:r="http://schemas.openxmlformats.org/officeDocument/2006/relationships">
+  <p:cSld>
+    <p:spTree>
+      <p:nvGrpSpPr>
+        <p:cNvPr id="1" name=""/>
+        <p:cNvGrpSpPr/>
+        <p:nvPr/>
+      </p:nvGrpSpPr>
+      <p:grpSpPr/>
+      <p:sp>
+        <p:nvSpPr>
+          <p:cNvPr id="2" name="TextBox 1"/>
+          <p:cNvSpPr txBox="1"/>
+          <p:nvPr/>
+        </p:nvSpPr>
+        <p:spPr>
+          <a:xfrm>
+            <a:off x="548640" y="365760"/>
+            <a:ext cx="11064240" cy="640080"/>
+          </a:xfrm>
+          <a:prstGeom prst="rect">
+            <a:avLst/>
+          </a:prstGeom>
+          <a:noFill/>
+        </p:spPr>
+        <p:txBody>
+          <a:bodyPr wrap="square">
+            <a:spAutoFit/>
+          </a:bodyPr>
+          <a:lstStyle/>
+          <a:p>
+            <a:pPr>
+              <a:defRPr sz="2800" b="1">
+                <a:solidFill>
+                  <a:srgbClr val="0B0B0B"/>
+                </a:solidFill>
+              </a:defRPr>
+            </a:pPr>
+            <a:r>
+              <a:t>Sine tracking results</a:t>
+            </a:r>
+          </a:p>
+        </p:txBody>
+      </p:sp>
+      <p:pic>
+        <p:nvPicPr>
+          <p:cNvPr id="3" name="Picture 2" descr="sine_response_steps.png"/>
+          <p:cNvPicPr>
+            <a:picLocks noChangeAspect="1"/>
+          </p:cNvPicPr>
+          <p:nvPr/>
+        </p:nvPicPr>
+        <p:blipFill>
+          <a:blip r:embed="rId2"/>
+          <a:stretch>
+            <a:fillRect/>
+          </a:stretch>
+        </p:blipFill>
+        <p:spPr>
+          <a:xfrm>
+            <a:off x="320040" y="1051560"/>
+            <a:ext cx="11521440" cy="6502962"/>
+          </a:xfrm>
+          <a:prstGeom prst="rect">
+            <a:avLst/>
+          </a:prstGeom>
+        </p:spPr>
+      </p:pic>
+    </p:spTree>
+  </p:cSld>
+  <p:clrMapOvr>
+    <a:masterClrMapping/>
+  </p:clrMapOvr>
+</p:sld>
+</file>
+
+<file path=ppt/slides/slide9.xml><?xml version="1.0" encoding="utf-8"?>
+<p:sld xmlns:a="http://schemas.openxmlformats.org/drawingml/2006/main" xmlns:p="http://schemas.openxmlformats.org/presentationml/2006/main" xmlns:r="http://schemas.openxmlformats.org/officeDocument/2006/relationships">
+  <p:cSld>
+    <p:spTree>
+      <p:nvGrpSpPr>
+        <p:cNvPr id="1" name=""/>
+        <p:cNvGrpSpPr/>
+        <p:nvPr/>
+      </p:nvGrpSpPr>
+      <p:grpSpPr/>
+      <p:sp>
+        <p:nvSpPr>
+          <p:cNvPr id="2" name="TextBox 1"/>
+          <p:cNvSpPr txBox="1"/>
+          <p:nvPr/>
+        </p:nvSpPr>
+        <p:spPr>
+          <a:xfrm>
+            <a:off x="548640" y="365760"/>
+            <a:ext cx="11064240" cy="640080"/>
+          </a:xfrm>
+          <a:prstGeom prst="rect">
+            <a:avLst/>
+          </a:prstGeom>
+          <a:noFill/>
+        </p:spPr>
+        <p:txBody>
+          <a:bodyPr wrap="square">
+            <a:spAutoFit/>
+          </a:bodyPr>
+          <a:lstStyle/>
+          <a:p>
+            <a:pPr>
+              <a:defRPr sz="2800" b="1">
+                <a:solidFill>
+                  <a:srgbClr val="0B0B0B"/>
+                </a:solidFill>
+              </a:defRPr>
+            </a:pPr>
+            <a:r>
+              <a:t>Sine tracking — summary &amp; findings</a:t>
+            </a:r>
+          </a:p>
+        </p:txBody>
+      </p:sp>
+      <p:graphicFrame>
+        <p:nvGraphicFramePr>
+          <p:cNvPr id="3" name="Table 2"/>
+          <p:cNvGraphicFramePr>
+            <a:graphicFrameLocks noGrp="1"/>
+          </p:cNvGraphicFramePr>
+          <p:nvPr/>
+        </p:nvGraphicFramePr>
+        <p:xfrm>
+          <a:off x="548640" y="1234440"/>
+          <a:ext cx="11064240" cy="1463040"/>
+        </p:xfrm>
+        <a:graphic>
+          <a:graphicData uri="http://schemas.openxmlformats.org/drawingml/2006/table">
+            <a:tbl>
+              <a:tblPr firstRow="1" bandRow="1">
+                <a:tableStyleId>{5C22544A-7EE6-4342-B048-85BDC9FD1C3A}</a:tableStyleId>
+              </a:tblPr>
+              <a:tblGrid>
+                <a:gridCol w="2212848"/>
+                <a:gridCol w="2212848"/>
+                <a:gridCol w="2212848"/>
+                <a:gridCol w="2212848"/>
+                <a:gridCol w="2212848"/>
+              </a:tblGrid>
+              <a:tr h="365760">
+                <a:tc>
+                  <a:txBody>
+                    <a:bodyPr/>
+                    <a:lstStyle/>
+                    <a:p>
+                      <a:pPr>
+                        <a:defRPr b="1" sz="1300">
+                          <a:solidFill>
+                            <a:srgbClr val="FFFFFF"/>
+                          </a:solidFill>
+                        </a:defRPr>
+                      </a:pPr>
+                      <a:r>
+                        <a:t>Freq</a:t>
+                      </a:r>
+                    </a:p>
+                  </a:txBody>
+                  <a:tcPr>
+                    <a:solidFill>
+                      <a:srgbClr val="2A78D6"/>
+                    </a:solidFill>
+                  </a:tcPr>
+                </a:tc>
+                <a:tc>
+                  <a:txBody>
+                    <a:bodyPr/>
+                    <a:lstStyle/>
+                    <a:p>
+                      <a:pPr>
+                        <a:defRPr b="1" sz="1300">
+                          <a:solidFill>
+                            <a:srgbClr val="FFFFFF"/>
+                          </a:solidFill>
+                        </a:defRPr>
+                      </a:pPr>
+                      <a:r>
+                        <a:t>Driven amp (x, px)</a:t>
+                      </a:r>
+                    </a:p>
+                  </a:txBody>
+                  <a:tcPr>
+                    <a:solidFill>
+                      <a:srgbClr val="2A78D6"/>
+                    </a:solidFill>
+                  </a:tcPr>
+                </a:tc>
+                <a:tc>
+                  <a:txBody>
+                    <a:bodyPr/>
+                    <a:lstStyle/>
+                    <a:p>
+                      <a:pPr>
+                        <a:defRPr b="1" sz="1300">
+                          <a:solidFill>
+                            <a:srgbClr val="FFFFFF"/>
+                          </a:solidFill>
+                        </a:defRPr>
+                      </a:pPr>
+                      <a:r>
+                        <a:t>Driven lag (x, ms)</a:t>
+                      </a:r>
+                    </a:p>
+                  </a:txBody>
+                  <a:tcPr>
+                    <a:solidFill>
+                      <a:srgbClr val="2A78D6"/>
+                    </a:solidFill>
+                  </a:tcPr>
+                </a:tc>
+                <a:tc>
+                  <a:txBody>
+                    <a:bodyPr/>
+                    <a:lstStyle/>
+                    <a:p>
+                      <a:pPr>
+                        <a:defRPr b="1" sz="1300">
+                          <a:solidFill>
+                            <a:srgbClr val="FFFFFF"/>
+                          </a:solidFill>
+                        </a:defRPr>
+                      </a:pPr>
+                      <a:r>
+                        <a:t>Cross amp (y, px)</a:t>
+                      </a:r>
+                    </a:p>
+                  </a:txBody>
+                  <a:tcPr>
+                    <a:solidFill>
+                      <a:srgbClr val="2A78D6"/>
+                    </a:solidFill>
+                  </a:tcPr>
+                </a:tc>
+                <a:tc>
+                  <a:txBody>
+                    <a:bodyPr/>
+                    <a:lstStyle/>
+                    <a:p>
+                      <a:pPr>
+                        <a:defRPr b="1" sz="1300">
+                          <a:solidFill>
+                            <a:srgbClr val="FFFFFF"/>
+                          </a:solidFill>
+                        </a:defRPr>
+                      </a:pPr>
+                      <a:r>
+                        <a:t>Cross lag (y, ms)</a:t>
+                      </a:r>
+                    </a:p>
+                  </a:txBody>
+                  <a:tcPr>
+                    <a:solidFill>
+                      <a:srgbClr val="2A78D6"/>
+                    </a:solidFill>
+                  </a:tcPr>
+                </a:tc>
+              </a:tr>
+              <a:tr h="365760">
+                <a:tc>
+                  <a:txBody>
+                    <a:bodyPr/>
+                    <a:lstStyle/>
+                    <a:p>
+                      <a:pPr>
+                        <a:defRPr sz="1200">
+                          <a:solidFill>
+                            <a:srgbClr val="0B0B0B"/>
+                          </a:solidFill>
+                        </a:defRPr>
+                      </a:pPr>
+                      <a:r>
+                        <a:t>0.5 Hz</a:t>
+                      </a:r>
+                    </a:p>
+                  </a:txBody>
+                  <a:tcPr/>
+                </a:tc>
+                <a:tc>
+                  <a:txBody>
+                    <a:bodyPr/>
+                    <a:lstStyle/>
+                    <a:p>
+                      <a:pPr>
+                        <a:defRPr sz="1200">
+                          <a:solidFill>
+                            <a:srgbClr val="0B0B0B"/>
+                          </a:solidFill>
+                        </a:defRPr>
+                      </a:pPr>
+                      <a:r>
+                        <a:t>13.0</a:t>
+                      </a:r>
+                    </a:p>
+                  </a:txBody>
+                  <a:tcPr/>
+                </a:tc>
+                <a:tc>
+                  <a:txBody>
+                    <a:bodyPr/>
+                    <a:lstStyle/>
+                    <a:p>
+                      <a:pPr>
+                        <a:defRPr sz="1200">
+                          <a:solidFill>
+                            <a:srgbClr val="0B0B0B"/>
+                          </a:solidFill>
+                        </a:defRPr>
+                      </a:pPr>
+                      <a:r>
+                        <a:t>-940</a:t>
+                      </a:r>
+                    </a:p>
+                  </a:txBody>
+                  <a:tcPr/>
+                </a:tc>
+                <a:tc>
+                  <a:txBody>
+                    <a:bodyPr/>
+                    <a:lstStyle/>
+                    <a:p>
+                      <a:pPr>
+                        <a:defRPr sz="1200">
+                          <a:solidFill>
+                            <a:srgbClr val="0B0B0B"/>
+                          </a:solidFill>
+                        </a:defRPr>
+                      </a:pPr>
+                      <a:r>
+                        <a:t>9.0</a:t>
+                      </a:r>
+                    </a:p>
+                  </a:txBody>
+                  <a:tcPr/>
+                </a:tc>
+                <a:tc>
+                  <a:txBody>
+                    <a:bodyPr/>
+                    <a:lstStyle/>
+                    <a:p>
+                      <a:pPr>
+                        <a:defRPr sz="1200">
+                          <a:solidFill>
+                            <a:srgbClr val="0B0B0B"/>
+                          </a:solidFill>
+                        </a:defRPr>
+                      </a:pPr>
+                      <a:r>
+                        <a:t>-942</a:t>
+                      </a:r>
+                    </a:p>
+                  </a:txBody>
+                  <a:tcPr/>
+                </a:tc>
+              </a:tr>
+              <a:tr h="365760">
+                <a:tc>
+                  <a:txBody>
+                    <a:bodyPr/>
+                    <a:lstStyle/>
+                    <a:p>
+                      <a:pPr>
+                        <a:defRPr sz="1200">
+                          <a:solidFill>
+                            <a:srgbClr val="0B0B0B"/>
+                          </a:solidFill>
+                        </a:defRPr>
+                      </a:pPr>
+                      <a:r>
+                        <a:t>1 Hz</a:t>
+                      </a:r>
+                    </a:p>
+                  </a:txBody>
+                  <a:tcPr/>
+                </a:tc>
+                <a:tc>
+                  <a:txBody>
+                    <a:bodyPr/>
+                    <a:lstStyle/>
+                    <a:p>
+                      <a:pPr>
+                        <a:defRPr sz="1200">
+                          <a:solidFill>
+                            <a:srgbClr val="0B0B0B"/>
+                          </a:solidFill>
+                        </a:defRPr>
+                      </a:pPr>
+                      <a:r>
+                        <a:t>12.2</a:t>
+                      </a:r>
+                    </a:p>
+                  </a:txBody>
+                  <a:tcPr/>
+                </a:tc>
+                <a:tc>
+                  <a:txBody>
+                    <a:bodyPr/>
+                    <a:lstStyle/>
+                    <a:p>
+                      <a:pPr>
+                        <a:defRPr sz="1200">
+                          <a:solidFill>
+                            <a:srgbClr val="0B0B0B"/>
+                          </a:solidFill>
+                        </a:defRPr>
+                      </a:pPr>
+                      <a:r>
+                        <a:t>-447</a:t>
+                      </a:r>
+                    </a:p>
+                  </a:txBody>
+                  <a:tcPr/>
+                </a:tc>
+                <a:tc>
+                  <a:txBody>
+                    <a:bodyPr/>
+                    <a:lstStyle/>
+                    <a:p>
+                      <a:pPr>
+                        <a:defRPr sz="1200">
+                          <a:solidFill>
+                            <a:srgbClr val="0B0B0B"/>
+                          </a:solidFill>
+                        </a:defRPr>
+                      </a:pPr>
+                      <a:r>
+                        <a:t>8.1</a:t>
+                      </a:r>
+                    </a:p>
+                  </a:txBody>
+                  <a:tcPr/>
+                </a:tc>
+                <a:tc>
+                  <a:txBody>
+                    <a:bodyPr/>
+                    <a:lstStyle/>
+                    <a:p>
+                      <a:pPr>
+                        <a:defRPr sz="1200">
+                          <a:solidFill>
+                            <a:srgbClr val="0B0B0B"/>
+                          </a:solidFill>
+                        </a:defRPr>
+                      </a:pPr>
+                      <a:r>
+                        <a:t>-448</a:t>
+                      </a:r>
+                    </a:p>
+                  </a:txBody>
+                  <a:tcPr/>
+                </a:tc>
+              </a:tr>
+              <a:tr h="365760">
+                <a:tc>
+                  <a:txBody>
+                    <a:bodyPr/>
+                    <a:lstStyle/>
+                    <a:p>
+                      <a:pPr>
+                        <a:defRPr sz="1200">
+                          <a:solidFill>
+                            <a:srgbClr val="0B0B0B"/>
+                          </a:solidFill>
+                        </a:defRPr>
+                      </a:pPr>
+                      <a:r>
+                        <a:t>2 Hz</a:t>
+                      </a:r>
+                    </a:p>
+                  </a:txBody>
+                  <a:tcPr/>
+                </a:tc>
+                <a:tc>
+                  <a:txBody>
+                    <a:bodyPr/>
+                    <a:lstStyle/>
+                    <a:p>
+                      <a:pPr>
+                        <a:defRPr sz="1200">
+                          <a:solidFill>
+                            <a:srgbClr val="0B0B0B"/>
+                          </a:solidFill>
+                        </a:defRPr>
+                      </a:pPr>
+                      <a:r>
+                        <a:t>11.5</a:t>
+                      </a:r>
+                    </a:p>
+                  </a:txBody>
+                  <a:tcPr/>
+                </a:tc>
+                <a:tc>
+                  <a:txBody>
+                    <a:bodyPr/>
+                    <a:lstStyle/>
+                    <a:p>
+                      <a:pPr>
+                        <a:defRPr sz="1200">
+                          <a:solidFill>
+                            <a:srgbClr val="0B0B0B"/>
+                          </a:solidFill>
+                        </a:defRPr>
+                      </a:pPr>
+                      <a:r>
+                        <a:t>-204</a:t>
+                      </a:r>
+                    </a:p>
+                  </a:txBody>
+                  <a:tcPr/>
+                </a:tc>
+                <a:tc>
+                  <a:txBody>
+                    <a:bodyPr/>
+                    <a:lstStyle/>
+                    <a:p>
+                      <a:pPr>
+                        <a:defRPr sz="1200">
+                          <a:solidFill>
+                            <a:srgbClr val="0B0B0B"/>
+                          </a:solidFill>
+                        </a:defRPr>
+                      </a:pPr>
+                      <a:r>
+                        <a:t>7.8</a:t>
+                      </a:r>
+                    </a:p>
+                  </a:txBody>
+                  <a:tcPr/>
+                </a:tc>
+                <a:tc>
+                  <a:txBody>
+                    <a:bodyPr/>
+                    <a:lstStyle/>
+                    <a:p>
+                      <a:pPr>
+                        <a:defRPr sz="1200">
+                          <a:solidFill>
+                            <a:srgbClr val="0B0B0B"/>
+                          </a:solidFill>
+                        </a:defRPr>
+                      </a:pPr>
+                      <a:r>
+                        <a:t>-207</a:t>
+                      </a:r>
+                    </a:p>
+                  </a:txBody>
+                  <a:tcPr/>
+                </a:tc>
+              </a:tr>
+            </a:tbl>
+          </a:graphicData>
+        </a:graphic>
+      </p:graphicFrame>
+      <p:sp>
+        <p:nvSpPr>
+          <p:cNvPr id="4" name="TextBox 3"/>
+          <p:cNvSpPr txBox="1"/>
+          <p:nvPr/>
+        </p:nvSpPr>
+        <p:spPr>
+          <a:xfrm>
+            <a:off x="731520" y="2742497740800"/>
+            <a:ext cx="10698480" cy="4572000"/>
+          </a:xfrm>
+          <a:prstGeom prst="rect">
+            <a:avLst/>
+          </a:prstGeom>
+          <a:noFill/>
+        </p:spPr>
+        <p:txBody>
+          <a:bodyPr wrap="square">
+            <a:spAutoFit/>
+          </a:bodyPr>
+          <a:lstStyle/>
+          <a:p>
+            <a:pPr>
+              <a:spcAft>
+                <a:spcPts val="1000"/>
+              </a:spcAft>
+              <a:defRPr sz="1350">
+                <a:solidFill>
+                  <a:srgbClr val="0B0B0B"/>
+                </a:solidFill>
+              </a:defRPr>
+            </a:pPr>
+            <a:r>
+              <a:t>•  Measured trace is a clean, low-noise sinusoid locked to the exact commanded frequency at every tested rate — good news qualitatively: the actuator tracks a continuous sine faithfully in SHAPE, not distorted or backlash-limited.</a:t>
+            </a:r>
+          </a:p>
+          <a:p>
+            <a:pPr>
+              <a:spcAft>
+                <a:spcPts val="1000"/>
+              </a:spcAft>
+              <a:defRPr sz="1350">
+                <a:solidFill>
+                  <a:srgbClr val="0B0B0B"/>
+                </a:solidFill>
+              </a:defRPr>
+            </a:pPr>
+            <a:r>
+              <a:t>•  But the fitted lag is surprisingly large even at 0.5Hz (~940ms, near half that period) — much bigger than the step-response settling times (125-469ms) would predict for the actuator alone, which is why we suspect the VCP-relay measurement path itself (see methodology caveat) is contributing most of this.</a:t>
+            </a:r>
+          </a:p>
+          <a:p>
+            <a:pPr>
+              <a:spcAft>
+                <a:spcPts val="1000"/>
+              </a:spcAft>
+              <a:defRPr sz="1350">
+                <a:solidFill>
+                  <a:srgbClr val="0B0B0B"/>
+                </a:solidFill>
+              </a:defRPr>
+            </a:pPr>
+            <a:r>
+              <a:t>•  Not yet resolved: separate real actuator/optics lag from test-method latency — next step is either an even-lower-frequency check (e.g. 0.1Hz, where true actuator lag should be negligible) or a camera-direct sine test on the Pi that removes the VCP relay from the measurement path entirely.</a:t>
             </a:r>
           </a:p>
         </p:txBody>

--- a/docs/session_results_2026-08-04.pptx
+++ b/docs/session_results_2026-08-04.pptx
@@ -3156,7 +3156,7 @@
               </a:defRPr>
             </a:pPr>
             <a:r>
-              <a:t>2026-08-04</a:t>
+              <a:t>2026-08-04 – 2026-08-06</a:t>
             </a:r>
           </a:p>
         </p:txBody>
@@ -4854,7 +4854,7 @@
               </a:defRPr>
             </a:pPr>
             <a:r>
-              <a:t>•  Complements the step-response tests: instead of a one-off transient, commands a continuous sine on axis X (±200 DAC counts around 2000) and measures how well the pixel position follows it — directly relevant to rejecting the project's actual 10-20Hz disturbance band.</a:t>
+              <a:t>•  Complements the step-response tests: commands a continuous sine on axis X (±200 DAC counts around 2000) and measures how well the pixel position follows it — directly relevant to rejecting the project's actual 10-20Hz disturbance band.</a:t>
             </a:r>
           </a:p>
           <a:p>
@@ -4869,7 +4869,7 @@
               </a:defRPr>
             </a:pPr>
             <a:r>
-              <a:t>•  Same laptop-only VCP approach as the step tests: set_x commands paced at 200Hz to trace the sine, measured position sourced from the Nucleo's per-packet I2C-relay print, no Pi access needed.</a:t>
+              <a:t>•  Same laptop-only VCP approach as the step tests: set_x commands paced at 200Hz, measured position sourced from the Nucleo's per-packet I2C-relay print. Amp state is now explicitly verified (not fire-and-forget) after a real false result on 2026-08-06: a silently-failed amp_enable produced a near-zero response briefly mistaken for a genuine actuator finding.</a:t>
             </a:r>
           </a:p>
           <a:p>
@@ -4884,7 +4884,7 @@
               </a:defRPr>
             </a:pPr>
             <a:r>
-              <a:t>•  Frequency is known exactly (we generate the command), so fitting the measured trace to A·sin(ωt)+B·cos(ωt)+C is a linear least-squares problem — no iterative fit needed. First full commanded cycle is excluded from each fit to avoid a startup transient (visible in the 1Hz run) contaminating the result.</a:t>
+              <a:t>•  Frequency is known exactly, so fitting the measured trace to A·sin(ωt)+B·cos(ωt)+C is linear least-squares, no iterative fit needed.</a:t>
             </a:r>
           </a:p>
           <a:p>
@@ -4899,7 +4899,7 @@
               </a:defRPr>
             </a:pPr>
             <a:r>
-              <a:t>•  IMPORTANT CAVEAT: this test's measurement path (I2C → Nucleo print → USB VCP → Python read) is NOT the path a real closed-loop controller would use — a future PID running on the Nucleo reads relayed telemetry directly at ISR level, with none of this print/USB/Python overhead. The fitted phase-lag numbers here likely include real actuator lag AND this test method's own added latency, not yet separated. Treat the SHAPE of the match as trustworthy; treat the exact lag numbers as an upper bound, not a clean actuator-only measurement.</a:t>
+              <a:t>•  IMPORTANT CORRECTION: the step-response data already showed DAC increases move the pixel value DOWN on this axis (a real, normal sign convention, not a bug). A negative gain shows up in a raw amplitude/phase fit as ≈180° phase at EVERY frequency, regardless of real dynamics — initially misread as a huge lag. Fixed by reporting a signed gain plus the residual lag relative to whichever reference (0° or 180°) the fit actually landed near.</a:t>
             </a:r>
           </a:p>
         </p:txBody>
@@ -4952,14 +4952,14 @@
               </a:defRPr>
             </a:pPr>
             <a:r>
-              <a:t>Sine tracking results</a:t>
+              <a:t>Sine tracking results (corrected)</a:t>
             </a:r>
           </a:p>
         </p:txBody>
       </p:sp>
       <p:pic>
         <p:nvPicPr>
-          <p:cNvPr id="3" name="Picture 2" descr="sine_response_steps.png"/>
+          <p:cNvPr id="3" name="Picture 2" descr="sine_response_corrected.png"/>
           <p:cNvPicPr>
             <a:picLocks noChangeAspect="1"/>
           </p:cNvPicPr>
@@ -4974,7 +4974,7 @@
         <p:spPr>
           <a:xfrm>
             <a:off x="320040" y="1051560"/>
-            <a:ext cx="11521440" cy="6502962"/>
+            <a:ext cx="11521440" cy="6559465"/>
           </a:xfrm>
           <a:prstGeom prst="rect">
             <a:avLst/>
@@ -5029,22 +5029,46 @@
               </a:defRPr>
             </a:pPr>
             <a:r>
-              <a:t>Sine tracking — summary &amp; findings</a:t>
-            </a:r>
-          </a:p>
-        </p:txBody>
-      </p:sp>
+              <a:t>Sine tracking — lag analysis &amp; findings</a:t>
+            </a:r>
+          </a:p>
+        </p:txBody>
+      </p:sp>
+      <p:pic>
+        <p:nvPicPr>
+          <p:cNvPr id="3" name="Picture 2" descr="sine_lag_vs_freq.png"/>
+          <p:cNvPicPr>
+            <a:picLocks noChangeAspect="1"/>
+          </p:cNvPicPr>
+          <p:nvPr/>
+        </p:nvPicPr>
+        <p:blipFill>
+          <a:blip r:embed="rId2"/>
+          <a:stretch>
+            <a:fillRect/>
+          </a:stretch>
+        </p:blipFill>
+        <p:spPr>
+          <a:xfrm>
+            <a:off x="457200" y="1143000"/>
+            <a:ext cx="5486400" cy="3291840"/>
+          </a:xfrm>
+          <a:prstGeom prst="rect">
+            <a:avLst/>
+          </a:prstGeom>
+        </p:spPr>
+      </p:pic>
       <p:graphicFrame>
         <p:nvGraphicFramePr>
-          <p:cNvPr id="3" name="Table 2"/>
+          <p:cNvPr id="4" name="Table 3"/>
           <p:cNvGraphicFramePr>
             <a:graphicFrameLocks noGrp="1"/>
           </p:cNvGraphicFramePr>
           <p:nvPr/>
         </p:nvGraphicFramePr>
         <p:xfrm>
-          <a:off x="548640" y="1234440"/>
-          <a:ext cx="11064240" cy="1463040"/>
+          <a:off x="6675120" y="1143000"/>
+          <a:ext cx="4937760" cy="1828800"/>
         </p:xfrm>
         <a:graphic>
           <a:graphicData uri="http://schemas.openxmlformats.org/drawingml/2006/table">
@@ -5053,11 +5077,9 @@
                 <a:tableStyleId>{5C22544A-7EE6-4342-B048-85BDC9FD1C3A}</a:tableStyleId>
               </a:tblPr>
               <a:tblGrid>
-                <a:gridCol w="2212848"/>
-                <a:gridCol w="2212848"/>
-                <a:gridCol w="2212848"/>
-                <a:gridCol w="2212848"/>
-                <a:gridCol w="2212848"/>
+                <a:gridCol w="1645920"/>
+                <a:gridCol w="1645920"/>
+                <a:gridCol w="1645920"/>
               </a:tblGrid>
               <a:tr h="365760">
                 <a:tc>
@@ -5096,7 +5118,7 @@
                         </a:defRPr>
                       </a:pPr>
                       <a:r>
-                        <a:t>Driven amp (x, px)</a:t>
+                        <a:t>Gain (px)</a:t>
                       </a:r>
                     </a:p>
                   </a:txBody>
@@ -5119,7 +5141,7 @@
                         </a:defRPr>
                       </a:pPr>
                       <a:r>
-                        <a:t>Driven lag (x, ms)</a:t>
+                        <a:t>Lag (ms)</a:t>
                       </a:r>
                     </a:p>
                   </a:txBody>
@@ -5129,52 +5151,6 @@
                     </a:solidFill>
                   </a:tcPr>
                 </a:tc>
-                <a:tc>
-                  <a:txBody>
-                    <a:bodyPr/>
-                    <a:lstStyle/>
-                    <a:p>
-                      <a:pPr>
-                        <a:defRPr b="1" sz="1300">
-                          <a:solidFill>
-                            <a:srgbClr val="FFFFFF"/>
-                          </a:solidFill>
-                        </a:defRPr>
-                      </a:pPr>
-                      <a:r>
-                        <a:t>Cross amp (y, px)</a:t>
-                      </a:r>
-                    </a:p>
-                  </a:txBody>
-                  <a:tcPr>
-                    <a:solidFill>
-                      <a:srgbClr val="2A78D6"/>
-                    </a:solidFill>
-                  </a:tcPr>
-                </a:tc>
-                <a:tc>
-                  <a:txBody>
-                    <a:bodyPr/>
-                    <a:lstStyle/>
-                    <a:p>
-                      <a:pPr>
-                        <a:defRPr b="1" sz="1300">
-                          <a:solidFill>
-                            <a:srgbClr val="FFFFFF"/>
-                          </a:solidFill>
-                        </a:defRPr>
-                      </a:pPr>
-                      <a:r>
-                        <a:t>Cross lag (y, ms)</a:t>
-                      </a:r>
-                    </a:p>
-                  </a:txBody>
-                  <a:tcPr>
-                    <a:solidFill>
-                      <a:srgbClr val="2A78D6"/>
-                    </a:solidFill>
-                  </a:tcPr>
-                </a:tc>
               </a:tr>
               <a:tr h="365760">
                 <a:tc>
@@ -5190,83 +5166,45 @@
                         </a:defRPr>
                       </a:pPr>
                       <a:r>
-                        <a:t>0.5 Hz</a:t>
-                      </a:r>
-                    </a:p>
-                  </a:txBody>
-                  <a:tcPr/>
-                </a:tc>
-                <a:tc>
-                  <a:txBody>
-                    <a:bodyPr/>
-                    <a:lstStyle/>
-                    <a:p>
-                      <a:pPr>
-                        <a:defRPr sz="1200">
-                          <a:solidFill>
-                            <a:srgbClr val="0B0B0B"/>
-                          </a:solidFill>
-                        </a:defRPr>
-                      </a:pPr>
-                      <a:r>
-                        <a:t>13.0</a:t>
-                      </a:r>
-                    </a:p>
-                  </a:txBody>
-                  <a:tcPr/>
-                </a:tc>
-                <a:tc>
-                  <a:txBody>
-                    <a:bodyPr/>
-                    <a:lstStyle/>
-                    <a:p>
-                      <a:pPr>
-                        <a:defRPr sz="1200">
-                          <a:solidFill>
-                            <a:srgbClr val="0B0B0B"/>
-                          </a:solidFill>
-                        </a:defRPr>
-                      </a:pPr>
-                      <a:r>
-                        <a:t>-940</a:t>
-                      </a:r>
-                    </a:p>
-                  </a:txBody>
-                  <a:tcPr/>
-                </a:tc>
-                <a:tc>
-                  <a:txBody>
-                    <a:bodyPr/>
-                    <a:lstStyle/>
-                    <a:p>
-                      <a:pPr>
-                        <a:defRPr sz="1200">
-                          <a:solidFill>
-                            <a:srgbClr val="0B0B0B"/>
-                          </a:solidFill>
-                        </a:defRPr>
-                      </a:pPr>
-                      <a:r>
-                        <a:t>9.0</a:t>
-                      </a:r>
-                    </a:p>
-                  </a:txBody>
-                  <a:tcPr/>
-                </a:tc>
-                <a:tc>
-                  <a:txBody>
-                    <a:bodyPr/>
-                    <a:lstStyle/>
-                    <a:p>
-                      <a:pPr>
-                        <a:defRPr sz="1200">
-                          <a:solidFill>
-                            <a:srgbClr val="0B0B0B"/>
-                          </a:solidFill>
-                        </a:defRPr>
-                      </a:pPr>
-                      <a:r>
-                        <a:t>-942</a:t>
+                        <a:t>0.1 Hz</a:t>
+                      </a:r>
+                    </a:p>
+                  </a:txBody>
+                  <a:tcPr/>
+                </a:tc>
+                <a:tc>
+                  <a:txBody>
+                    <a:bodyPr/>
+                    <a:lstStyle/>
+                    <a:p>
+                      <a:pPr>
+                        <a:defRPr sz="1200">
+                          <a:solidFill>
+                            <a:srgbClr val="0B0B0B"/>
+                          </a:solidFill>
+                        </a:defRPr>
+                      </a:pPr>
+                      <a:r>
+                        <a:t>-19.2</a:t>
+                      </a:r>
+                    </a:p>
+                  </a:txBody>
+                  <a:tcPr/>
+                </a:tc>
+                <a:tc>
+                  <a:txBody>
+                    <a:bodyPr/>
+                    <a:lstStyle/>
+                    <a:p>
+                      <a:pPr>
+                        <a:defRPr sz="1200">
+                          <a:solidFill>
+                            <a:srgbClr val="0B0B0B"/>
+                          </a:solidFill>
+                        </a:defRPr>
+                      </a:pPr>
+                      <a:r>
+                        <a:t>161</a:t>
                       </a:r>
                     </a:p>
                   </a:txBody>
@@ -5287,83 +5225,45 @@
                         </a:defRPr>
                       </a:pPr>
                       <a:r>
-                        <a:t>1 Hz</a:t>
-                      </a:r>
-                    </a:p>
-                  </a:txBody>
-                  <a:tcPr/>
-                </a:tc>
-                <a:tc>
-                  <a:txBody>
-                    <a:bodyPr/>
-                    <a:lstStyle/>
-                    <a:p>
-                      <a:pPr>
-                        <a:defRPr sz="1200">
-                          <a:solidFill>
-                            <a:srgbClr val="0B0B0B"/>
-                          </a:solidFill>
-                        </a:defRPr>
-                      </a:pPr>
-                      <a:r>
-                        <a:t>12.2</a:t>
-                      </a:r>
-                    </a:p>
-                  </a:txBody>
-                  <a:tcPr/>
-                </a:tc>
-                <a:tc>
-                  <a:txBody>
-                    <a:bodyPr/>
-                    <a:lstStyle/>
-                    <a:p>
-                      <a:pPr>
-                        <a:defRPr sz="1200">
-                          <a:solidFill>
-                            <a:srgbClr val="0B0B0B"/>
-                          </a:solidFill>
-                        </a:defRPr>
-                      </a:pPr>
-                      <a:r>
-                        <a:t>-447</a:t>
-                      </a:r>
-                    </a:p>
-                  </a:txBody>
-                  <a:tcPr/>
-                </a:tc>
-                <a:tc>
-                  <a:txBody>
-                    <a:bodyPr/>
-                    <a:lstStyle/>
-                    <a:p>
-                      <a:pPr>
-                        <a:defRPr sz="1200">
-                          <a:solidFill>
-                            <a:srgbClr val="0B0B0B"/>
-                          </a:solidFill>
-                        </a:defRPr>
-                      </a:pPr>
-                      <a:r>
-                        <a:t>8.1</a:t>
-                      </a:r>
-                    </a:p>
-                  </a:txBody>
-                  <a:tcPr/>
-                </a:tc>
-                <a:tc>
-                  <a:txBody>
-                    <a:bodyPr/>
-                    <a:lstStyle/>
-                    <a:p>
-                      <a:pPr>
-                        <a:defRPr sz="1200">
-                          <a:solidFill>
-                            <a:srgbClr val="0B0B0B"/>
-                          </a:solidFill>
-                        </a:defRPr>
-                      </a:pPr>
-                      <a:r>
-                        <a:t>-448</a:t>
+                        <a:t>0.5 Hz</a:t>
+                      </a:r>
+                    </a:p>
+                  </a:txBody>
+                  <a:tcPr/>
+                </a:tc>
+                <a:tc>
+                  <a:txBody>
+                    <a:bodyPr/>
+                    <a:lstStyle/>
+                    <a:p>
+                      <a:pPr>
+                        <a:defRPr sz="1200">
+                          <a:solidFill>
+                            <a:srgbClr val="0B0B0B"/>
+                          </a:solidFill>
+                        </a:defRPr>
+                      </a:pPr>
+                      <a:r>
+                        <a:t>-17.8</a:t>
+                      </a:r>
+                    </a:p>
+                  </a:txBody>
+                  <a:tcPr/>
+                </a:tc>
+                <a:tc>
+                  <a:txBody>
+                    <a:bodyPr/>
+                    <a:lstStyle/>
+                    <a:p>
+                      <a:pPr>
+                        <a:defRPr sz="1200">
+                          <a:solidFill>
+                            <a:srgbClr val="0B0B0B"/>
+                          </a:solidFill>
+                        </a:defRPr>
+                      </a:pPr>
+                      <a:r>
+                        <a:t>68</a:t>
                       </a:r>
                     </a:p>
                   </a:txBody>
@@ -5384,6 +5284,65 @@
                         </a:defRPr>
                       </a:pPr>
                       <a:r>
+                        <a:t>1 Hz</a:t>
+                      </a:r>
+                    </a:p>
+                  </a:txBody>
+                  <a:tcPr/>
+                </a:tc>
+                <a:tc>
+                  <a:txBody>
+                    <a:bodyPr/>
+                    <a:lstStyle/>
+                    <a:p>
+                      <a:pPr>
+                        <a:defRPr sz="1200">
+                          <a:solidFill>
+                            <a:srgbClr val="0B0B0B"/>
+                          </a:solidFill>
+                        </a:defRPr>
+                      </a:pPr>
+                      <a:r>
+                        <a:t>-16.6</a:t>
+                      </a:r>
+                    </a:p>
+                  </a:txBody>
+                  <a:tcPr/>
+                </a:tc>
+                <a:tc>
+                  <a:txBody>
+                    <a:bodyPr/>
+                    <a:lstStyle/>
+                    <a:p>
+                      <a:pPr>
+                        <a:defRPr sz="1200">
+                          <a:solidFill>
+                            <a:srgbClr val="0B0B0B"/>
+                          </a:solidFill>
+                        </a:defRPr>
+                      </a:pPr>
+                      <a:r>
+                        <a:t>59</a:t>
+                      </a:r>
+                    </a:p>
+                  </a:txBody>
+                  <a:tcPr/>
+                </a:tc>
+              </a:tr>
+              <a:tr h="365760">
+                <a:tc>
+                  <a:txBody>
+                    <a:bodyPr/>
+                    <a:lstStyle/>
+                    <a:p>
+                      <a:pPr>
+                        <a:defRPr sz="1200">
+                          <a:solidFill>
+                            <a:srgbClr val="0B0B0B"/>
+                          </a:solidFill>
+                        </a:defRPr>
+                      </a:pPr>
+                      <a:r>
                         <a:t>2 Hz</a:t>
                       </a:r>
                     </a:p>
@@ -5403,64 +5362,26 @@
                         </a:defRPr>
                       </a:pPr>
                       <a:r>
-                        <a:t>11.5</a:t>
-                      </a:r>
-                    </a:p>
-                  </a:txBody>
-                  <a:tcPr/>
-                </a:tc>
-                <a:tc>
-                  <a:txBody>
-                    <a:bodyPr/>
-                    <a:lstStyle/>
-                    <a:p>
-                      <a:pPr>
-                        <a:defRPr sz="1200">
-                          <a:solidFill>
-                            <a:srgbClr val="0B0B0B"/>
-                          </a:solidFill>
-                        </a:defRPr>
-                      </a:pPr>
-                      <a:r>
-                        <a:t>-204</a:t>
-                      </a:r>
-                    </a:p>
-                  </a:txBody>
-                  <a:tcPr/>
-                </a:tc>
-                <a:tc>
-                  <a:txBody>
-                    <a:bodyPr/>
-                    <a:lstStyle/>
-                    <a:p>
-                      <a:pPr>
-                        <a:defRPr sz="1200">
-                          <a:solidFill>
-                            <a:srgbClr val="0B0B0B"/>
-                          </a:solidFill>
-                        </a:defRPr>
-                      </a:pPr>
-                      <a:r>
-                        <a:t>7.8</a:t>
-                      </a:r>
-                    </a:p>
-                  </a:txBody>
-                  <a:tcPr/>
-                </a:tc>
-                <a:tc>
-                  <a:txBody>
-                    <a:bodyPr/>
-                    <a:lstStyle/>
-                    <a:p>
-                      <a:pPr>
-                        <a:defRPr sz="1200">
-                          <a:solidFill>
-                            <a:srgbClr val="0B0B0B"/>
-                          </a:solidFill>
-                        </a:defRPr>
-                      </a:pPr>
-                      <a:r>
-                        <a:t>-207</a:t>
+                        <a:t>-15.2</a:t>
+                      </a:r>
+                    </a:p>
+                  </a:txBody>
+                  <a:tcPr/>
+                </a:tc>
+                <a:tc>
+                  <a:txBody>
+                    <a:bodyPr/>
+                    <a:lstStyle/>
+                    <a:p>
+                      <a:pPr>
+                        <a:defRPr sz="1200">
+                          <a:solidFill>
+                            <a:srgbClr val="0B0B0B"/>
+                          </a:solidFill>
+                        </a:defRPr>
+                      </a:pPr>
+                      <a:r>
+                        <a:t>47</a:t>
                       </a:r>
                     </a:p>
                   </a:txBody>
@@ -5473,14 +5394,14 @@
       </p:graphicFrame>
       <p:sp>
         <p:nvSpPr>
-          <p:cNvPr id="4" name="TextBox 3"/>
+          <p:cNvPr id="5" name="TextBox 4"/>
           <p:cNvSpPr txBox="1"/>
           <p:nvPr/>
         </p:nvSpPr>
         <p:spPr>
           <a:xfrm>
-            <a:off x="731520" y="2742497740800"/>
-            <a:ext cx="10698480" cy="4572000"/>
+            <a:off x="418063680000" y="4264249536000"/>
+            <a:ext cx="10284366528000" cy="1839480192000"/>
           </a:xfrm>
           <a:prstGeom prst="rect">
             <a:avLst/>
@@ -5497,14 +5418,14 @@
               <a:spcAft>
                 <a:spcPts val="1000"/>
               </a:spcAft>
-              <a:defRPr sz="1350">
+              <a:defRPr sz="1300">
                 <a:solidFill>
                   <a:srgbClr val="0B0B0B"/>
                 </a:solidFill>
               </a:defRPr>
             </a:pPr>
             <a:r>
-              <a:t>•  Measured trace is a clean, low-noise sinusoid locked to the exact commanded frequency at every tested rate — good news qualitatively: the actuator tracks a continuous sine faithfully in SHAPE, not distorted or backlash-limited.</a:t>
+              <a:t>•  Lag-vs-frequency is close to a straight line through near-zero (residuals under 1.5° across 0.1-2Hz) — the signature of a roughly CONSTANT time delay (~41ms), not frequency-dependent actuator dynamics (which would curve/plateau, not stay linear).</a:t>
             </a:r>
           </a:p>
           <a:p>
@@ -5512,14 +5433,14 @@
               <a:spcAft>
                 <a:spcPts val="1000"/>
               </a:spcAft>
-              <a:defRPr sz="1350">
+              <a:defRPr sz="1300">
                 <a:solidFill>
                   <a:srgbClr val="0B0B0B"/>
                 </a:solidFill>
               </a:defRPr>
             </a:pPr>
             <a:r>
-              <a:t>•  But the fitted lag is surprisingly large even at 0.5Hz (~940ms, near half that period) — much bigger than the step-response settling times (125-469ms) would predict for the actuator alone, which is why we suspect the VCP-relay measurement path itself (see methodology caveat) is contributing most of this.</a:t>
+              <a:t>•  ~41ms is a plausible total for this test's own measurement pipeline (camera capture → I2C → Nucleo print → USB VCP → Python read) — a real closed-loop PID running on the Nucleo reads telemetry directly at ISR level and would not pay most of this cost.</a:t>
             </a:r>
           </a:p>
           <a:p>
@@ -5527,14 +5448,29 @@
               <a:spcAft>
                 <a:spcPts val="1000"/>
               </a:spcAft>
-              <a:defRPr sz="1350">
+              <a:defRPr sz="1300">
                 <a:solidFill>
                   <a:srgbClr val="0B0B0B"/>
                 </a:solidFill>
               </a:defRPr>
             </a:pPr>
             <a:r>
-              <a:t>•  Not yet resolved: separate real actuator/optics lag from test-method latency — next step is either an even-lower-frequency check (e.g. 0.1Hz, where true actuator lag should be negligible) or a camera-direct sine test on the Pi that removes the VCP relay from the measurement path entirely.</a:t>
+              <a:t>•  Gain is consistent across all 4 frequencies (-15 to -19px per 200 DAC counts, mildly declining with frequency) — no sign of the actuator failing to track or distorting at any rate tested so far, up to 2Hz.</a:t>
+            </a:r>
+          </a:p>
+          <a:p>
+            <a:pPr>
+              <a:spcAft>
+                <a:spcPts val="1000"/>
+              </a:spcAft>
+              <a:defRPr sz="1300">
+                <a:solidFill>
+                  <a:srgbClr val="0B0B0B"/>
+                </a:solidFill>
+              </a:defRPr>
+            </a:pPr>
+            <a:r>
+              <a:t>•  Net effect: the actuator's own dynamics look faster/cleaner than initially feared. Doesn't yet answer the real question (10-20Hz) — next step is pushing frequency into that band, now that the analysis is trustworthy.</a:t>
             </a:r>
           </a:p>
         </p:txBody>

--- a/docs/session_results_2026-08-04.pptx
+++ b/docs/session_results_2026-08-04.pptx
@@ -14,6 +14,8 @@
     <p:sldId id="262" r:id="rId13"/>
     <p:sldId id="263" r:id="rId14"/>
     <p:sldId id="264" r:id="rId15"/>
+    <p:sldId id="265" r:id="rId16"/>
+    <p:sldId id="266" r:id="rId17"/>
   </p:sldIdLst>
   <p:sldSz cx="12191695" cy="6858000" type="screen4x3"/>
   <p:notesSz cx="6858000" cy="9144000"/>
@@ -3157,6 +3159,798 @@
             </a:pPr>
             <a:r>
               <a:t>2026-08-04 – 2026-08-06</a:t>
+            </a:r>
+          </a:p>
+        </p:txBody>
+      </p:sp>
+    </p:spTree>
+  </p:cSld>
+  <p:clrMapOvr>
+    <a:masterClrMapping/>
+  </p:clrMapOvr>
+</p:sld>
+</file>
+
+<file path=ppt/slides/slide10.xml><?xml version="1.0" encoding="utf-8"?>
+<p:sld xmlns:a="http://schemas.openxmlformats.org/drawingml/2006/main" xmlns:p="http://schemas.openxmlformats.org/presentationml/2006/main" xmlns:r="http://schemas.openxmlformats.org/officeDocument/2006/relationships">
+  <p:cSld>
+    <p:spTree>
+      <p:nvGrpSpPr>
+        <p:cNvPr id="1" name=""/>
+        <p:cNvGrpSpPr/>
+        <p:nvPr/>
+      </p:nvGrpSpPr>
+      <p:grpSpPr/>
+      <p:sp>
+        <p:nvSpPr>
+          <p:cNvPr id="2" name="TextBox 1"/>
+          <p:cNvSpPr txBox="1"/>
+          <p:nvPr/>
+        </p:nvSpPr>
+        <p:spPr>
+          <a:xfrm>
+            <a:off x="548640" y="365760"/>
+            <a:ext cx="11064240" cy="640080"/>
+          </a:xfrm>
+          <a:prstGeom prst="rect">
+            <a:avLst/>
+          </a:prstGeom>
+          <a:noFill/>
+        </p:spPr>
+        <p:txBody>
+          <a:bodyPr wrap="square">
+            <a:spAutoFit/>
+          </a:bodyPr>
+          <a:lstStyle/>
+          <a:p>
+            <a:pPr>
+              <a:defRPr sz="2800" b="1">
+                <a:solidFill>
+                  <a:srgbClr val="0B0B0B"/>
+                </a:solidFill>
+              </a:defRPr>
+            </a:pPr>
+            <a:r>
+              <a:t>Pushing toward the 10-20Hz disturbance band</a:t>
+            </a:r>
+          </a:p>
+        </p:txBody>
+      </p:sp>
+      <p:pic>
+        <p:nvPicPr>
+          <p:cNvPr id="3" name="Picture 2" descr="sine_highfreq.png"/>
+          <p:cNvPicPr>
+            <a:picLocks noChangeAspect="1"/>
+          </p:cNvPicPr>
+          <p:nvPr/>
+        </p:nvPicPr>
+        <p:blipFill>
+          <a:blip r:embed="rId2"/>
+          <a:stretch>
+            <a:fillRect/>
+          </a:stretch>
+        </p:blipFill>
+        <p:spPr>
+          <a:xfrm>
+            <a:off x="320040" y="1051560"/>
+            <a:ext cx="11521440" cy="6559465"/>
+          </a:xfrm>
+          <a:prstGeom prst="rect">
+            <a:avLst/>
+          </a:prstGeom>
+        </p:spPr>
+      </p:pic>
+    </p:spTree>
+  </p:cSld>
+  <p:clrMapOvr>
+    <a:masterClrMapping/>
+  </p:clrMapOvr>
+</p:sld>
+</file>
+
+<file path=ppt/slides/slide11.xml><?xml version="1.0" encoding="utf-8"?>
+<p:sld xmlns:a="http://schemas.openxmlformats.org/drawingml/2006/main" xmlns:p="http://schemas.openxmlformats.org/presentationml/2006/main" xmlns:r="http://schemas.openxmlformats.org/officeDocument/2006/relationships">
+  <p:cSld>
+    <p:spTree>
+      <p:nvGrpSpPr>
+        <p:cNvPr id="1" name=""/>
+        <p:cNvGrpSpPr/>
+        <p:nvPr/>
+      </p:nvGrpSpPr>
+      <p:grpSpPr/>
+      <p:sp>
+        <p:nvSpPr>
+          <p:cNvPr id="2" name="TextBox 1"/>
+          <p:cNvSpPr txBox="1"/>
+          <p:nvPr/>
+        </p:nvSpPr>
+        <p:spPr>
+          <a:xfrm>
+            <a:off x="548640" y="365760"/>
+            <a:ext cx="11064240" cy="640080"/>
+          </a:xfrm>
+          <a:prstGeom prst="rect">
+            <a:avLst/>
+          </a:prstGeom>
+          <a:noFill/>
+        </p:spPr>
+        <p:txBody>
+          <a:bodyPr wrap="square">
+            <a:spAutoFit/>
+          </a:bodyPr>
+          <a:lstStyle/>
+          <a:p>
+            <a:pPr>
+              <a:defRPr sz="2800" b="1">
+                <a:solidFill>
+                  <a:srgbClr val="0B0B0B"/>
+                </a:solidFill>
+              </a:defRPr>
+            </a:pPr>
+            <a:r>
+              <a:t>Gain rolls off well before 10-20Hz</a:t>
+            </a:r>
+          </a:p>
+        </p:txBody>
+      </p:sp>
+      <p:pic>
+        <p:nvPicPr>
+          <p:cNvPr id="3" name="Picture 2" descr="sine_gain_vs_freq.png"/>
+          <p:cNvPicPr>
+            <a:picLocks noChangeAspect="1"/>
+          </p:cNvPicPr>
+          <p:nvPr/>
+        </p:nvPicPr>
+        <p:blipFill>
+          <a:blip r:embed="rId2"/>
+          <a:stretch>
+            <a:fillRect/>
+          </a:stretch>
+        </p:blipFill>
+        <p:spPr>
+          <a:xfrm>
+            <a:off x="365760" y="1097280"/>
+            <a:ext cx="6089367" cy="3291840"/>
+          </a:xfrm>
+          <a:prstGeom prst="rect">
+            <a:avLst/>
+          </a:prstGeom>
+        </p:spPr>
+      </p:pic>
+      <p:graphicFrame>
+        <p:nvGraphicFramePr>
+          <p:cNvPr id="4" name="Table 3"/>
+          <p:cNvGraphicFramePr>
+            <a:graphicFrameLocks noGrp="1"/>
+          </p:cNvGraphicFramePr>
+          <p:nvPr/>
+        </p:nvGraphicFramePr>
+        <p:xfrm>
+          <a:off x="7863840" y="1097280"/>
+          <a:ext cx="3931920" cy="2880360"/>
+        </p:xfrm>
+        <a:graphic>
+          <a:graphicData uri="http://schemas.openxmlformats.org/drawingml/2006/table">
+            <a:tbl>
+              <a:tblPr firstRow="1" bandRow="1">
+                <a:tableStyleId>{5C22544A-7EE6-4342-B048-85BDC9FD1C3A}</a:tableStyleId>
+              </a:tblPr>
+              <a:tblGrid>
+                <a:gridCol w="1310640"/>
+                <a:gridCol w="1310640"/>
+                <a:gridCol w="1310640"/>
+              </a:tblGrid>
+              <a:tr h="320040">
+                <a:tc>
+                  <a:txBody>
+                    <a:bodyPr/>
+                    <a:lstStyle/>
+                    <a:p>
+                      <a:pPr>
+                        <a:defRPr b="1" sz="1100">
+                          <a:solidFill>
+                            <a:srgbClr val="FFFFFF"/>
+                          </a:solidFill>
+                        </a:defRPr>
+                      </a:pPr>
+                      <a:r>
+                        <a:t>Freq</a:t>
+                      </a:r>
+                    </a:p>
+                  </a:txBody>
+                  <a:tcPr>
+                    <a:solidFill>
+                      <a:srgbClr val="2A78D6"/>
+                    </a:solidFill>
+                  </a:tcPr>
+                </a:tc>
+                <a:tc>
+                  <a:txBody>
+                    <a:bodyPr/>
+                    <a:lstStyle/>
+                    <a:p>
+                      <a:pPr>
+                        <a:defRPr b="1" sz="1100">
+                          <a:solidFill>
+                            <a:srgbClr val="FFFFFF"/>
+                          </a:solidFill>
+                        </a:defRPr>
+                      </a:pPr>
+                      <a:r>
+                        <a:t>Gain (px)</a:t>
+                      </a:r>
+                    </a:p>
+                  </a:txBody>
+                  <a:tcPr>
+                    <a:solidFill>
+                      <a:srgbClr val="2A78D6"/>
+                    </a:solidFill>
+                  </a:tcPr>
+                </a:tc>
+                <a:tc>
+                  <a:txBody>
+                    <a:bodyPr/>
+                    <a:lstStyle/>
+                    <a:p>
+                      <a:pPr>
+                        <a:defRPr b="1" sz="1100">
+                          <a:solidFill>
+                            <a:srgbClr val="FFFFFF"/>
+                          </a:solidFill>
+                        </a:defRPr>
+                      </a:pPr>
+                      <a:r>
+                        <a:t>Lag</a:t>
+                      </a:r>
+                    </a:p>
+                  </a:txBody>
+                  <a:tcPr>
+                    <a:solidFill>
+                      <a:srgbClr val="2A78D6"/>
+                    </a:solidFill>
+                  </a:tcPr>
+                </a:tc>
+              </a:tr>
+              <a:tr h="320040">
+                <a:tc>
+                  <a:txBody>
+                    <a:bodyPr/>
+                    <a:lstStyle/>
+                    <a:p>
+                      <a:pPr>
+                        <a:defRPr sz="1100">
+                          <a:solidFill>
+                            <a:srgbClr val="0B0B0B"/>
+                          </a:solidFill>
+                        </a:defRPr>
+                      </a:pPr>
+                      <a:r>
+                        <a:t>0.1 Hz</a:t>
+                      </a:r>
+                    </a:p>
+                  </a:txBody>
+                  <a:tcPr/>
+                </a:tc>
+                <a:tc>
+                  <a:txBody>
+                    <a:bodyPr/>
+                    <a:lstStyle/>
+                    <a:p>
+                      <a:pPr>
+                        <a:defRPr sz="1100">
+                          <a:solidFill>
+                            <a:srgbClr val="0B0B0B"/>
+                          </a:solidFill>
+                        </a:defRPr>
+                      </a:pPr>
+                      <a:r>
+                        <a:t>-19.2</a:t>
+                      </a:r>
+                    </a:p>
+                  </a:txBody>
+                  <a:tcPr/>
+                </a:tc>
+                <a:tc>
+                  <a:txBody>
+                    <a:bodyPr/>
+                    <a:lstStyle/>
+                    <a:p>
+                      <a:pPr>
+                        <a:defRPr sz="1100">
+                          <a:solidFill>
+                            <a:srgbClr val="0B0B0B"/>
+                          </a:solidFill>
+                        </a:defRPr>
+                      </a:pPr>
+                      <a:r>
+                        <a:t>161ms</a:t>
+                      </a:r>
+                    </a:p>
+                  </a:txBody>
+                  <a:tcPr/>
+                </a:tc>
+              </a:tr>
+              <a:tr h="320040">
+                <a:tc>
+                  <a:txBody>
+                    <a:bodyPr/>
+                    <a:lstStyle/>
+                    <a:p>
+                      <a:pPr>
+                        <a:defRPr sz="1100">
+                          <a:solidFill>
+                            <a:srgbClr val="0B0B0B"/>
+                          </a:solidFill>
+                        </a:defRPr>
+                      </a:pPr>
+                      <a:r>
+                        <a:t>0.5 Hz</a:t>
+                      </a:r>
+                    </a:p>
+                  </a:txBody>
+                  <a:tcPr/>
+                </a:tc>
+                <a:tc>
+                  <a:txBody>
+                    <a:bodyPr/>
+                    <a:lstStyle/>
+                    <a:p>
+                      <a:pPr>
+                        <a:defRPr sz="1100">
+                          <a:solidFill>
+                            <a:srgbClr val="0B0B0B"/>
+                          </a:solidFill>
+                        </a:defRPr>
+                      </a:pPr>
+                      <a:r>
+                        <a:t>-17.8</a:t>
+                      </a:r>
+                    </a:p>
+                  </a:txBody>
+                  <a:tcPr/>
+                </a:tc>
+                <a:tc>
+                  <a:txBody>
+                    <a:bodyPr/>
+                    <a:lstStyle/>
+                    <a:p>
+                      <a:pPr>
+                        <a:defRPr sz="1100">
+                          <a:solidFill>
+                            <a:srgbClr val="0B0B0B"/>
+                          </a:solidFill>
+                        </a:defRPr>
+                      </a:pPr>
+                      <a:r>
+                        <a:t>68ms</a:t>
+                      </a:r>
+                    </a:p>
+                  </a:txBody>
+                  <a:tcPr/>
+                </a:tc>
+              </a:tr>
+              <a:tr h="320040">
+                <a:tc>
+                  <a:txBody>
+                    <a:bodyPr/>
+                    <a:lstStyle/>
+                    <a:p>
+                      <a:pPr>
+                        <a:defRPr sz="1100">
+                          <a:solidFill>
+                            <a:srgbClr val="0B0B0B"/>
+                          </a:solidFill>
+                        </a:defRPr>
+                      </a:pPr>
+                      <a:r>
+                        <a:t>1 Hz</a:t>
+                      </a:r>
+                    </a:p>
+                  </a:txBody>
+                  <a:tcPr/>
+                </a:tc>
+                <a:tc>
+                  <a:txBody>
+                    <a:bodyPr/>
+                    <a:lstStyle/>
+                    <a:p>
+                      <a:pPr>
+                        <a:defRPr sz="1100">
+                          <a:solidFill>
+                            <a:srgbClr val="0B0B0B"/>
+                          </a:solidFill>
+                        </a:defRPr>
+                      </a:pPr>
+                      <a:r>
+                        <a:t>-16.6</a:t>
+                      </a:r>
+                    </a:p>
+                  </a:txBody>
+                  <a:tcPr/>
+                </a:tc>
+                <a:tc>
+                  <a:txBody>
+                    <a:bodyPr/>
+                    <a:lstStyle/>
+                    <a:p>
+                      <a:pPr>
+                        <a:defRPr sz="1100">
+                          <a:solidFill>
+                            <a:srgbClr val="0B0B0B"/>
+                          </a:solidFill>
+                        </a:defRPr>
+                      </a:pPr>
+                      <a:r>
+                        <a:t>59ms</a:t>
+                      </a:r>
+                    </a:p>
+                  </a:txBody>
+                  <a:tcPr/>
+                </a:tc>
+              </a:tr>
+              <a:tr h="320040">
+                <a:tc>
+                  <a:txBody>
+                    <a:bodyPr/>
+                    <a:lstStyle/>
+                    <a:p>
+                      <a:pPr>
+                        <a:defRPr sz="1100">
+                          <a:solidFill>
+                            <a:srgbClr val="0B0B0B"/>
+                          </a:solidFill>
+                        </a:defRPr>
+                      </a:pPr>
+                      <a:r>
+                        <a:t>2 Hz</a:t>
+                      </a:r>
+                    </a:p>
+                  </a:txBody>
+                  <a:tcPr/>
+                </a:tc>
+                <a:tc>
+                  <a:txBody>
+                    <a:bodyPr/>
+                    <a:lstStyle/>
+                    <a:p>
+                      <a:pPr>
+                        <a:defRPr sz="1100">
+                          <a:solidFill>
+                            <a:srgbClr val="0B0B0B"/>
+                          </a:solidFill>
+                        </a:defRPr>
+                      </a:pPr>
+                      <a:r>
+                        <a:t>-15.2</a:t>
+                      </a:r>
+                    </a:p>
+                  </a:txBody>
+                  <a:tcPr/>
+                </a:tc>
+                <a:tc>
+                  <a:txBody>
+                    <a:bodyPr/>
+                    <a:lstStyle/>
+                    <a:p>
+                      <a:pPr>
+                        <a:defRPr sz="1100">
+                          <a:solidFill>
+                            <a:srgbClr val="0B0B0B"/>
+                          </a:solidFill>
+                        </a:defRPr>
+                      </a:pPr>
+                      <a:r>
+                        <a:t>47ms</a:t>
+                      </a:r>
+                    </a:p>
+                  </a:txBody>
+                  <a:tcPr/>
+                </a:tc>
+              </a:tr>
+              <a:tr h="320040">
+                <a:tc>
+                  <a:txBody>
+                    <a:bodyPr/>
+                    <a:lstStyle/>
+                    <a:p>
+                      <a:pPr>
+                        <a:defRPr sz="1100">
+                          <a:solidFill>
+                            <a:srgbClr val="0B0B0B"/>
+                          </a:solidFill>
+                        </a:defRPr>
+                      </a:pPr>
+                      <a:r>
+                        <a:t>5 Hz</a:t>
+                      </a:r>
+                    </a:p>
+                  </a:txBody>
+                  <a:tcPr/>
+                </a:tc>
+                <a:tc>
+                  <a:txBody>
+                    <a:bodyPr/>
+                    <a:lstStyle/>
+                    <a:p>
+                      <a:pPr>
+                        <a:defRPr sz="1100">
+                          <a:solidFill>
+                            <a:srgbClr val="0B0B0B"/>
+                          </a:solidFill>
+                        </a:defRPr>
+                      </a:pPr>
+                      <a:r>
+                        <a:t>+10.3</a:t>
+                      </a:r>
+                    </a:p>
+                  </a:txBody>
+                  <a:tcPr/>
+                </a:tc>
+                <a:tc>
+                  <a:txBody>
+                    <a:bodyPr/>
+                    <a:lstStyle/>
+                    <a:p>
+                      <a:pPr>
+                        <a:defRPr sz="1100">
+                          <a:solidFill>
+                            <a:srgbClr val="0B0B0B"/>
+                          </a:solidFill>
+                        </a:defRPr>
+                      </a:pPr>
+                      <a:r>
+                        <a:t>-50ms</a:t>
+                      </a:r>
+                    </a:p>
+                  </a:txBody>
+                  <a:tcPr/>
+                </a:tc>
+              </a:tr>
+              <a:tr h="320040">
+                <a:tc>
+                  <a:txBody>
+                    <a:bodyPr/>
+                    <a:lstStyle/>
+                    <a:p>
+                      <a:pPr>
+                        <a:defRPr sz="1100">
+                          <a:solidFill>
+                            <a:srgbClr val="0B0B0B"/>
+                          </a:solidFill>
+                        </a:defRPr>
+                      </a:pPr>
+                      <a:r>
+                        <a:t>10 Hz</a:t>
+                      </a:r>
+                    </a:p>
+                  </a:txBody>
+                  <a:tcPr/>
+                </a:tc>
+                <a:tc>
+                  <a:txBody>
+                    <a:bodyPr/>
+                    <a:lstStyle/>
+                    <a:p>
+                      <a:pPr>
+                        <a:defRPr sz="1100">
+                          <a:solidFill>
+                            <a:srgbClr val="0B0B0B"/>
+                          </a:solidFill>
+                        </a:defRPr>
+                      </a:pPr>
+                      <a:r>
+                        <a:t>+9.2</a:t>
+                      </a:r>
+                    </a:p>
+                  </a:txBody>
+                  <a:tcPr/>
+                </a:tc>
+                <a:tc>
+                  <a:txBody>
+                    <a:bodyPr/>
+                    <a:lstStyle/>
+                    <a:p>
+                      <a:pPr>
+                        <a:defRPr sz="1100">
+                          <a:solidFill>
+                            <a:srgbClr val="0B0B0B"/>
+                          </a:solidFill>
+                        </a:defRPr>
+                      </a:pPr>
+                      <a:r>
+                        <a:t>unreliable*</a:t>
+                      </a:r>
+                    </a:p>
+                  </a:txBody>
+                  <a:tcPr/>
+                </a:tc>
+              </a:tr>
+              <a:tr h="320040">
+                <a:tc>
+                  <a:txBody>
+                    <a:bodyPr/>
+                    <a:lstStyle/>
+                    <a:p>
+                      <a:pPr>
+                        <a:defRPr sz="1100">
+                          <a:solidFill>
+                            <a:srgbClr val="0B0B0B"/>
+                          </a:solidFill>
+                        </a:defRPr>
+                      </a:pPr>
+                      <a:r>
+                        <a:t>15 Hz</a:t>
+                      </a:r>
+                    </a:p>
+                  </a:txBody>
+                  <a:tcPr/>
+                </a:tc>
+                <a:tc>
+                  <a:txBody>
+                    <a:bodyPr/>
+                    <a:lstStyle/>
+                    <a:p>
+                      <a:pPr>
+                        <a:defRPr sz="1100">
+                          <a:solidFill>
+                            <a:srgbClr val="0B0B0B"/>
+                          </a:solidFill>
+                        </a:defRPr>
+                      </a:pPr>
+                      <a:r>
+                        <a:t>+2.6</a:t>
+                      </a:r>
+                    </a:p>
+                  </a:txBody>
+                  <a:tcPr/>
+                </a:tc>
+                <a:tc>
+                  <a:txBody>
+                    <a:bodyPr/>
+                    <a:lstStyle/>
+                    <a:p>
+                      <a:pPr>
+                        <a:defRPr sz="1100">
+                          <a:solidFill>
+                            <a:srgbClr val="0B0B0B"/>
+                          </a:solidFill>
+                        </a:defRPr>
+                      </a:pPr>
+                      <a:r>
+                        <a:t>unreliable*</a:t>
+                      </a:r>
+                    </a:p>
+                  </a:txBody>
+                  <a:tcPr/>
+                </a:tc>
+              </a:tr>
+              <a:tr h="320040">
+                <a:tc>
+                  <a:txBody>
+                    <a:bodyPr/>
+                    <a:lstStyle/>
+                    <a:p>
+                      <a:pPr>
+                        <a:defRPr sz="1100">
+                          <a:solidFill>
+                            <a:srgbClr val="0B0B0B"/>
+                          </a:solidFill>
+                        </a:defRPr>
+                      </a:pPr>
+                      <a:r>
+                        <a:t>20 Hz</a:t>
+                      </a:r>
+                    </a:p>
+                  </a:txBody>
+                  <a:tcPr/>
+                </a:tc>
+                <a:tc>
+                  <a:txBody>
+                    <a:bodyPr/>
+                    <a:lstStyle/>
+                    <a:p>
+                      <a:pPr>
+                        <a:defRPr sz="1100">
+                          <a:solidFill>
+                            <a:srgbClr val="0B0B0B"/>
+                          </a:solidFill>
+                        </a:defRPr>
+                      </a:pPr>
+                      <a:r>
+                        <a:t>-4.1</a:t>
+                      </a:r>
+                    </a:p>
+                  </a:txBody>
+                  <a:tcPr/>
+                </a:tc>
+                <a:tc>
+                  <a:txBody>
+                    <a:bodyPr/>
+                    <a:lstStyle/>
+                    <a:p>
+                      <a:pPr>
+                        <a:defRPr sz="1100">
+                          <a:solidFill>
+                            <a:srgbClr val="0B0B0B"/>
+                          </a:solidFill>
+                        </a:defRPr>
+                      </a:pPr>
+                      <a:r>
+                        <a:t>unreliable*</a:t>
+                      </a:r>
+                    </a:p>
+                  </a:txBody>
+                  <a:tcPr/>
+                </a:tc>
+              </a:tr>
+            </a:tbl>
+          </a:graphicData>
+        </a:graphic>
+      </p:graphicFrame>
+      <p:sp>
+        <p:nvSpPr>
+          <p:cNvPr id="5" name="TextBox 4"/>
+          <p:cNvSpPr txBox="1"/>
+          <p:nvPr/>
+        </p:nvSpPr>
+        <p:spPr>
+          <a:xfrm>
+            <a:off x="334450944000" y="4180636800000"/>
+            <a:ext cx="10451592000000" cy="1923092928000"/>
+          </a:xfrm>
+          <a:prstGeom prst="rect">
+            <a:avLst/>
+          </a:prstGeom>
+          <a:noFill/>
+        </p:spPr>
+        <p:txBody>
+          <a:bodyPr wrap="square">
+            <a:spAutoFit/>
+          </a:bodyPr>
+          <a:lstStyle/>
+          <a:p>
+            <a:pPr>
+              <a:spcAft>
+                <a:spcPts val="1000"/>
+              </a:spcAft>
+              <a:defRPr sz="1350">
+                <a:solidFill>
+                  <a:srgbClr val="0B0B0B"/>
+                </a:solidFill>
+              </a:defRPr>
+            </a:pPr>
+            <a:r>
+              <a:t>•  Gain drops from ~19px (0.1Hz) to ~2.6-4px (15-20Hz) — down to roughly 15-20% of the low-frequency value, right at the frequencies this project actually needs to reject.</a:t>
+            </a:r>
+          </a:p>
+          <a:p>
+            <a:pPr>
+              <a:spcAft>
+                <a:spcPts val="1000"/>
+              </a:spcAft>
+              <a:defRPr sz="1350">
+                <a:solidFill>
+                  <a:srgbClr val="0B0B0B"/>
+                </a:solidFill>
+              </a:defRPr>
+            </a:pPr>
+            <a:r>
+              <a:t>•  *Lag not reported above ~5-10Hz: at 10Hz the phase already reaches the fundamental single-frequency wraparound boundary (~180°) — a real mathematical ambiguity, not a bug — and by 15-20Hz the signal is small enough that noise likely dominates the fit anyway (visible directly in the previous slide's traces).</a:t>
+            </a:r>
+          </a:p>
+          <a:p>
+            <a:pPr>
+              <a:spcAft>
+                <a:spcPts val="1000"/>
+              </a:spcAft>
+              <a:defRPr sz="1350">
+                <a:solidFill>
+                  <a:srgbClr val="0B0B0B"/>
+                </a:solidFill>
+              </a:defRPr>
+            </a:pPr>
+            <a:r>
+              <a:t>•  This is a plant-bandwidth finding, not a controller-tuning one: if the actuator itself can only produce ~15-20% of its response at 10-20Hz, no amount of PID gain fixes that — worth resolving before investing further in gain selection.</a:t>
             </a:r>
           </a:p>
         </p:txBody>

--- a/docs/session_results_2026-08-04.pptx
+++ b/docs/session_results_2026-08-04.pptx
@@ -16,6 +16,8 @@
     <p:sldId id="264" r:id="rId15"/>
     <p:sldId id="265" r:id="rId16"/>
     <p:sldId id="266" r:id="rId17"/>
+    <p:sldId id="267" r:id="rId18"/>
+    <p:sldId id="268" r:id="rId19"/>
   </p:sldIdLst>
   <p:sldSz cx="12191695" cy="6858000" type="screen4x3"/>
   <p:notesSz cx="6858000" cy="9144000"/>
@@ -3951,6 +3953,311 @@
             </a:pPr>
             <a:r>
               <a:t>•  This is a plant-bandwidth finding, not a controller-tuning one: if the actuator itself can only produce ~15-20% of its response at 10-20Hz, no amount of PID gain fixes that — worth resolving before investing further in gain selection.</a:t>
+            </a:r>
+          </a:p>
+        </p:txBody>
+      </p:sp>
+    </p:spTree>
+  </p:cSld>
+  <p:clrMapOvr>
+    <a:masterClrMapping/>
+  </p:clrMapOvr>
+</p:sld>
+</file>
+
+<file path=ppt/slides/slide12.xml><?xml version="1.0" encoding="utf-8"?>
+<p:sld xmlns:a="http://schemas.openxmlformats.org/drawingml/2006/main" xmlns:p="http://schemas.openxmlformats.org/presentationml/2006/main" xmlns:r="http://schemas.openxmlformats.org/officeDocument/2006/relationships">
+  <p:cSld>
+    <p:spTree>
+      <p:nvGrpSpPr>
+        <p:cNvPr id="1" name=""/>
+        <p:cNvGrpSpPr/>
+        <p:nvPr/>
+      </p:nvGrpSpPr>
+      <p:grpSpPr/>
+      <p:sp>
+        <p:nvSpPr>
+          <p:cNvPr id="2" name="TextBox 1"/>
+          <p:cNvSpPr txBox="1"/>
+          <p:nvPr/>
+        </p:nvSpPr>
+        <p:spPr>
+          <a:xfrm>
+            <a:off x="548640" y="365760"/>
+            <a:ext cx="11064240" cy="640080"/>
+          </a:xfrm>
+          <a:prstGeom prst="rect">
+            <a:avLst/>
+          </a:prstGeom>
+          <a:noFill/>
+        </p:spPr>
+        <p:txBody>
+          <a:bodyPr wrap="square">
+            <a:spAutoFit/>
+          </a:bodyPr>
+          <a:lstStyle/>
+          <a:p>
+            <a:pPr>
+              <a:defRPr sz="2800" b="1">
+                <a:solidFill>
+                  <a:srgbClr val="0B0B0B"/>
+                </a:solidFill>
+              </a:defRPr>
+            </a:pPr>
+            <a:r>
+              <a:t>Correcting for cross-axis coupling: true displacement, not just x</a:t>
+            </a:r>
+          </a:p>
+        </p:txBody>
+      </p:sp>
+      <p:sp>
+        <p:nvSpPr>
+          <p:cNvPr id="3" name="TextBox 2"/>
+          <p:cNvSpPr txBox="1"/>
+          <p:nvPr/>
+        </p:nvSpPr>
+        <p:spPr>
+          <a:xfrm>
+            <a:off x="731520" y="1554480"/>
+            <a:ext cx="10698480" cy="4572000"/>
+          </a:xfrm>
+          <a:prstGeom prst="rect">
+            <a:avLst/>
+          </a:prstGeom>
+          <a:noFill/>
+        </p:spPr>
+        <p:txBody>
+          <a:bodyPr wrap="square">
+            <a:spAutoFit/>
+          </a:bodyPr>
+          <a:lstStyle/>
+          <a:p>
+            <a:pPr>
+              <a:spcAft>
+                <a:spcPts val="1000"/>
+              </a:spcAft>
+              <a:defRPr sz="1600">
+                <a:solidFill>
+                  <a:srgbClr val="0B0B0B"/>
+                </a:solidFill>
+              </a:defRPr>
+            </a:pPr>
+            <a:r>
+              <a:t>•  Every gain number on the previous slides was the x-pixel projection only — it ignored the real cross-axis (y) component confirmed in every test so far. True displacement is |vector| = sqrt(gain_x² + gain_y²), not gain_x alone.</a:t>
+            </a:r>
+          </a:p>
+          <a:p>
+            <a:pPr>
+              <a:spcAft>
+                <a:spcPts val="1000"/>
+              </a:spcAft>
+              <a:defRPr sz="1600">
+                <a:solidFill>
+                  <a:srgbClr val="0B0B0B"/>
+                </a:solidFill>
+              </a:defRPr>
+            </a:pPr>
+            <a:r>
+              <a:t>•  At 0.1-2Hz the correction is small (~1%) — the cross-coupling fraction is modest there. At 5-20Hz it's 6-14% larger than the x-only number — meaningful, though it does not change the headline conclusion (severe rolloff by 15-20Hz still holds).</a:t>
+            </a:r>
+          </a:p>
+          <a:p>
+            <a:pPr>
+              <a:spcAft>
+                <a:spcPts val="1000"/>
+              </a:spcAft>
+              <a:defRPr sz="1600">
+                <a:solidFill>
+                  <a:srgbClr val="0B0B0B"/>
+                </a:solidFill>
+              </a:defRPr>
+            </a:pPr>
+            <a:r>
+              <a:t>•  More interesting: the motion vector's ANGLE rotates sharply between 2-3Hz (from a steady ~-171.5° to ~-150 to -160°), then holds roughly steady through 20Hz — not a gradual drift, closer to a step change. Evidence the two mechanical axes (x-ish and y-ish) have different dynamics, not identical ones.</a:t>
+            </a:r>
+          </a:p>
+          <a:p>
+            <a:pPr>
+              <a:spcAft>
+                <a:spcPts val="1000"/>
+              </a:spcAft>
+              <a:defRPr sz="1600">
+                <a:solidFill>
+                  <a:srgbClr val="0B0B0B"/>
+                </a:solidFill>
+              </a:defRPr>
+            </a:pPr>
+            <a:r>
+              <a:t>•  Ran a finer 3-12Hz sweep (1Hz steps) specifically to locate whatever's causing this, instead of inferring it from 4 widely-spaced points.</a:t>
+            </a:r>
+          </a:p>
+        </p:txBody>
+      </p:sp>
+    </p:spTree>
+  </p:cSld>
+  <p:clrMapOvr>
+    <a:masterClrMapping/>
+  </p:clrMapOvr>
+</p:sld>
+</file>
+
+<file path=ppt/slides/slide13.xml><?xml version="1.0" encoding="utf-8"?>
+<p:sld xmlns:a="http://schemas.openxmlformats.org/drawingml/2006/main" xmlns:p="http://schemas.openxmlformats.org/presentationml/2006/main" xmlns:r="http://schemas.openxmlformats.org/officeDocument/2006/relationships">
+  <p:cSld>
+    <p:spTree>
+      <p:nvGrpSpPr>
+        <p:cNvPr id="1" name=""/>
+        <p:cNvGrpSpPr/>
+        <p:nvPr/>
+      </p:nvGrpSpPr>
+      <p:grpSpPr/>
+      <p:sp>
+        <p:nvSpPr>
+          <p:cNvPr id="2" name="TextBox 1"/>
+          <p:cNvSpPr txBox="1"/>
+          <p:nvPr/>
+        </p:nvSpPr>
+        <p:spPr>
+          <a:xfrm>
+            <a:off x="548640" y="365760"/>
+            <a:ext cx="11064240" cy="640080"/>
+          </a:xfrm>
+          <a:prstGeom prst="rect">
+            <a:avLst/>
+          </a:prstGeom>
+          <a:noFill/>
+        </p:spPr>
+        <p:txBody>
+          <a:bodyPr wrap="square">
+            <a:spAutoFit/>
+          </a:bodyPr>
+          <a:lstStyle/>
+          <a:p>
+            <a:pPr>
+              <a:defRPr sz="2800" b="1">
+                <a:solidFill>
+                  <a:srgbClr val="0B0B0B"/>
+                </a:solidFill>
+              </a:defRPr>
+            </a:pPr>
+            <a:r>
+              <a:t>Fine sweep: not simple rolloff — plateau, dip, and a sharp axis rotation</a:t>
+            </a:r>
+          </a:p>
+        </p:txBody>
+      </p:sp>
+      <p:pic>
+        <p:nvPicPr>
+          <p:cNvPr id="3" name="Picture 2" descr="vector_mag_vs_freq.png"/>
+          <p:cNvPicPr>
+            <a:picLocks noChangeAspect="1"/>
+          </p:cNvPicPr>
+          <p:nvPr/>
+        </p:nvPicPr>
+        <p:blipFill>
+          <a:blip r:embed="rId2"/>
+          <a:stretch>
+            <a:fillRect/>
+          </a:stretch>
+        </p:blipFill>
+        <p:spPr>
+          <a:xfrm>
+            <a:off x="365760" y="1005840"/>
+            <a:ext cx="5577840" cy="2974848"/>
+          </a:xfrm>
+          <a:prstGeom prst="rect">
+            <a:avLst/>
+          </a:prstGeom>
+        </p:spPr>
+      </p:pic>
+      <p:pic>
+        <p:nvPicPr>
+          <p:cNvPr id="4" name="Picture 3" descr="vector_angle_vs_freq.png"/>
+          <p:cNvPicPr>
+            <a:picLocks noChangeAspect="1"/>
+          </p:cNvPicPr>
+          <p:nvPr/>
+        </p:nvPicPr>
+        <p:blipFill>
+          <a:blip r:embed="rId3"/>
+          <a:stretch>
+            <a:fillRect/>
+          </a:stretch>
+        </p:blipFill>
+        <p:spPr>
+          <a:xfrm>
+            <a:off x="6172200" y="1005840"/>
+            <a:ext cx="5577840" cy="2602992"/>
+          </a:xfrm>
+          <a:prstGeom prst="rect">
+            <a:avLst/>
+          </a:prstGeom>
+        </p:spPr>
+      </p:pic>
+      <p:sp>
+        <p:nvSpPr>
+          <p:cNvPr id="5" name="TextBox 4"/>
+          <p:cNvSpPr txBox="1"/>
+          <p:nvPr/>
+        </p:nvSpPr>
+        <p:spPr>
+          <a:xfrm>
+            <a:off x="334450944000" y="4306055904000"/>
+            <a:ext cx="10451592000000" cy="1755867456000"/>
+          </a:xfrm>
+          <a:prstGeom prst="rect">
+            <a:avLst/>
+          </a:prstGeom>
+          <a:noFill/>
+        </p:spPr>
+        <p:txBody>
+          <a:bodyPr wrap="square">
+            <a:spAutoFit/>
+          </a:bodyPr>
+          <a:lstStyle/>
+          <a:p>
+            <a:pPr>
+              <a:spcAft>
+                <a:spcPts val="1000"/>
+              </a:spcAft>
+              <a:defRPr sz="1300">
+                <a:solidFill>
+                  <a:srgbClr val="0B0B0B"/>
+                </a:solidFill>
+              </a:defRPr>
+            </a:pPr>
+            <a:r>
+              <a:t>•  Magnitude plateaus 6-10Hz (~11-12px, barely declining from the 5Hz value) rather than continuing a smooth rolloff, dips sharply at 11Hz (~8.4px), then partially recovers at 12Hz (~11.4px) before collapsing by 15Hz.</a:t>
+            </a:r>
+          </a:p>
+          <a:p>
+            <a:pPr>
+              <a:spcAft>
+                <a:spcPts val="1000"/>
+              </a:spcAft>
+              <a:defRPr sz="1300">
+                <a:solidFill>
+                  <a:srgbClr val="0B0B0B"/>
+                </a:solidFill>
+              </a:defRPr>
+            </a:pPr>
+            <a:r>
+              <a:t>•  That shape — plateau + dip + partial recovery — is not what a simple single-pole (first-order) actuator would produce; it's more consistent with resonance/anti-resonance behavior from a higher-order or two-mode mechanical system (e.g. the x and y flexure axes having close but distinct resonant frequencies that interact).</a:t>
+            </a:r>
+          </a:p>
+          <a:p>
+            <a:pPr>
+              <a:spcAft>
+                <a:spcPts val="1000"/>
+              </a:spcAft>
+              <a:defRPr sz="1300">
+                <a:solidFill>
+                  <a:srgbClr val="0B0B0B"/>
+                </a:solidFill>
+              </a:defRPr>
+            </a:pPr>
+            <a:r>
+              <a:t>•  Practical read: this actuator's dynamics are more complex than "one bandwidth number" — a stiffer flexure (raising the resonant frequency, see prior discussion) is still the right general lever, but which axis to stiffen, and whether damping needs addressing too, isn't answerable from this data alone. Would need per-axis excitation (drive x and y separately, not just x) to fully separate the two modes.</a:t>
             </a:r>
           </a:p>
         </p:txBody>

--- a/docs/session_results_2026-08-04.pptx
+++ b/docs/session_results_2026-08-04.pptx
@@ -3192,7 +3192,7 @@
         <p:spPr>
           <a:xfrm>
             <a:off x="548640" y="365760"/>
-            <a:ext cx="11064240" cy="640080"/>
+            <a:ext cx="11064240" cy="914400"/>
           </a:xfrm>
           <a:prstGeom prst="rect">
             <a:avLst/>
@@ -3216,11 +3216,23 @@
               <a:t>Pushing toward the 10-20Hz disturbance band</a:t>
             </a:r>
           </a:p>
+          <a:p>
+            <a:pPr>
+              <a:defRPr sz="1400">
+                <a:solidFill>
+                  <a:srgbClr val="52514E"/>
+                </a:solidFill>
+              </a:defRPr>
+            </a:pPr>
+            <a:r>
+              <a:t>Projected onto the actuator's fitted motion axis, not the camera's x/y axes</a:t>
+            </a:r>
+          </a:p>
         </p:txBody>
       </p:sp>
       <p:pic>
         <p:nvPicPr>
-          <p:cNvPr id="3" name="Picture 2" descr="sine_highfreq.png"/>
+          <p:cNvPr id="3" name="Picture 2" descr="sine_highfreq_rotated.png"/>
           <p:cNvPicPr>
             <a:picLocks noChangeAspect="1"/>
           </p:cNvPicPr>
@@ -3234,8 +3246,8 @@
         </p:blipFill>
         <p:spPr>
           <a:xfrm>
-            <a:off x="320040" y="1051560"/>
-            <a:ext cx="11521440" cy="6559465"/>
+            <a:off x="320040" y="1234440"/>
+            <a:ext cx="11521440" cy="6606377"/>
           </a:xfrm>
           <a:prstGeom prst="rect">
             <a:avLst/>

--- a/docs/session_results_2026-08-04.pptx
+++ b/docs/session_results_2026-08-04.pptx
@@ -18,6 +18,9 @@
     <p:sldId id="266" r:id="rId17"/>
     <p:sldId id="267" r:id="rId18"/>
     <p:sldId id="268" r:id="rId19"/>
+    <p:sldId id="269" r:id="rId20"/>
+    <p:sldId id="270" r:id="rId21"/>
+    <p:sldId id="271" r:id="rId22"/>
   </p:sldIdLst>
   <p:sldSz cx="12191695" cy="6858000" type="screen4x3"/>
   <p:notesSz cx="6858000" cy="9144000"/>
@@ -3964,7 +3967,7 @@
               </a:defRPr>
             </a:pPr>
             <a:r>
-              <a:t>•  This is a plant-bandwidth finding, not a controller-tuning one: if the actuator itself can only produce ~15-20% of its response at 10-20Hz, no amount of PID gain fixes that — worth resolving before investing further in gain selection.</a:t>
+              <a:t>•  CORRECTION (see "Amplitude matters" slides further on): this entire slide used ±200 DAC counts. Repeating at ±400/±800 shows the 15-20Hz collapse seen here was largely a nonlinear threshold effect specific to small commanded amplitude, not a hard actuator bandwidth ceiling — do not treat this slide's rolloff as the final word.</a:t>
             </a:r>
           </a:p>
         </p:txBody>
@@ -4070,7 +4073,7 @@
               </a:defRPr>
             </a:pPr>
             <a:r>
-              <a:t>•  At 0.1-2Hz the correction is small (~1%) — the cross-coupling fraction is modest there. At 5-20Hz it's 6-14% larger than the x-only number — meaningful, though it does not change the headline conclusion (severe rolloff by 15-20Hz still holds).</a:t>
+              <a:t>•  At 0.1-2Hz the correction is small (~1%) — the cross-coupling fraction is modest there. At 5-20Hz it's 6-14% larger than the x-only number — meaningful, though on its own it doesn't overturn the ±200-count rolloff conclusion.</a:t>
             </a:r>
           </a:p>
           <a:p>
@@ -4085,7 +4088,7 @@
               </a:defRPr>
             </a:pPr>
             <a:r>
-              <a:t>•  More interesting: the motion vector's ANGLE rotates sharply between 2-3Hz (from a steady ~-171.5° to ~-150 to -160°), then holds roughly steady through 20Hz — not a gradual drift, closer to a step change. Evidence the two mechanical axes (x-ish and y-ish) have different dynamics, not identical ones.</a:t>
+              <a:t>•  The motion vector's ANGLE appeared to rotate sharply between 2-3Hz (~-171.5° → ~-150 to -160°) in this pass. RETRACTED two slides on ("Angle rotation was a batch artifact") — repeating a low frequency later in a clean single-session sweep showed this was a time-dependent shift between test batches, not a frequency effect.</a:t>
             </a:r>
           </a:p>
           <a:p>
@@ -4100,7 +4103,7 @@
               </a:defRPr>
             </a:pPr>
             <a:r>
-              <a:t>•  Ran a finer 3-12Hz sweep (1Hz steps) specifically to locate whatever's causing this, instead of inferring it from 4 widely-spaced points.</a:t>
+              <a:t>•  Ran a finer 3-12Hz sweep (1Hz steps) to locate what looked at the time like real structure — see the correction for what that sweep actually showed once the batch-artifact issue was understood.</a:t>
             </a:r>
           </a:p>
         </p:txBody>
@@ -4153,7 +4156,7 @@
               </a:defRPr>
             </a:pPr>
             <a:r>
-              <a:t>Fine sweep: not simple rolloff — plateau, dip, and a sharp axis rotation</a:t>
+              <a:t>Fine sweep, as understood at the time (see retraction on the next slide)</a:t>
             </a:r>
           </a:p>
         </p:txBody>
@@ -4239,7 +4242,7 @@
               </a:defRPr>
             </a:pPr>
             <a:r>
-              <a:t>•  Magnitude plateaus 6-10Hz (~11-12px, barely declining from the 5Hz value) rather than continuing a smooth rolloff, dips sharply at 11Hz (~8.4px), then partially recovers at 12Hz (~11.4px) before collapsing by 15Hz.</a:t>
+              <a:t>•  Magnitude plateaus 6-10Hz, dips sharply at 11Hz, partially recovers at 12Hz, then collapses by 15Hz — at the time read as resonance/anti-resonance from a two-mode mechanical system.</a:t>
             </a:r>
           </a:p>
           <a:p>
@@ -4254,7 +4257,7 @@
               </a:defRPr>
             </a:pPr>
             <a:r>
-              <a:t>•  That shape — plateau + dip + partial recovery — is not what a simple single-pole (first-order) actuator would produce; it's more consistent with resonance/anti-resonance behavior from a higher-order or two-mode mechanical system (e.g. the x and y flexure axes having close but distinct resonant frequencies that interact).</a:t>
+              <a:t>•  That reading is now considered unreliable: this entire fine sweep was run in the same post-calibration session/batch as the earlier 5-20Hz points, so it shares whatever caused the angle/offset shift documented on the next slide. The dip-and-recovery shape's cause (measurement noise vs. a real feature) was not re-verified with a clean repeat before this deck was built.</a:t>
             </a:r>
           </a:p>
           <a:p>
@@ -4269,7 +4272,368 @@
               </a:defRPr>
             </a:pPr>
             <a:r>
-              <a:t>•  Practical read: this actuator's dynamics are more complex than "one bandwidth number" — a stiffer flexure (raising the resonant frequency, see prior discussion) is still the right general lever, but which axis to stiffen, and whether damping needs addressing too, isn't answerable from this data alone. Would need per-axis excitation (drive x and y separately, not just x) to fully separate the two modes.</a:t>
+              <a:t>•  Kept in the deck for the record, not as a trusted finding — see the retraction and the amplitude-comparison slides for the corrected picture.</a:t>
+            </a:r>
+          </a:p>
+        </p:txBody>
+      </p:sp>
+    </p:spTree>
+  </p:cSld>
+  <p:clrMapOvr>
+    <a:masterClrMapping/>
+  </p:clrMapOvr>
+</p:sld>
+</file>
+
+<file path=ppt/slides/slide14.xml><?xml version="1.0" encoding="utf-8"?>
+<p:sld xmlns:a="http://schemas.openxmlformats.org/drawingml/2006/main" xmlns:p="http://schemas.openxmlformats.org/presentationml/2006/main" xmlns:r="http://schemas.openxmlformats.org/officeDocument/2006/relationships">
+  <p:cSld>
+    <p:spTree>
+      <p:nvGrpSpPr>
+        <p:cNvPr id="1" name=""/>
+        <p:cNvGrpSpPr/>
+        <p:nvPr/>
+      </p:nvGrpSpPr>
+      <p:grpSpPr/>
+      <p:sp>
+        <p:nvSpPr>
+          <p:cNvPr id="2" name="TextBox 1"/>
+          <p:cNvSpPr txBox="1"/>
+          <p:nvPr/>
+        </p:nvSpPr>
+        <p:spPr>
+          <a:xfrm>
+            <a:off x="548640" y="365760"/>
+            <a:ext cx="11064240" cy="640080"/>
+          </a:xfrm>
+          <a:prstGeom prst="rect">
+            <a:avLst/>
+          </a:prstGeom>
+          <a:noFill/>
+        </p:spPr>
+        <p:txBody>
+          <a:bodyPr wrap="square">
+            <a:spAutoFit/>
+          </a:bodyPr>
+          <a:lstStyle/>
+          <a:p>
+            <a:pPr>
+              <a:defRPr sz="2800" b="1">
+                <a:solidFill>
+                  <a:srgbClr val="0B0B0B"/>
+                </a:solidFill>
+              </a:defRPr>
+            </a:pPr>
+            <a:r>
+              <a:t>Retraction: the angle rotation was a batch artifact, not frequency-dependent</a:t>
+            </a:r>
+          </a:p>
+        </p:txBody>
+      </p:sp>
+      <p:sp>
+        <p:nvSpPr>
+          <p:cNvPr id="3" name="TextBox 2"/>
+          <p:cNvSpPr txBox="1"/>
+          <p:nvPr/>
+        </p:nvSpPr>
+        <p:spPr>
+          <a:xfrm>
+            <a:off x="731520" y="1554480"/>
+            <a:ext cx="10698480" cy="4572000"/>
+          </a:xfrm>
+          <a:prstGeom prst="rect">
+            <a:avLst/>
+          </a:prstGeom>
+          <a:noFill/>
+        </p:spPr>
+        <p:txBody>
+          <a:bodyPr wrap="square">
+            <a:spAutoFit/>
+          </a:bodyPr>
+          <a:lstStyle/>
+          <a:p>
+            <a:pPr>
+              <a:spcAft>
+                <a:spcPts val="1000"/>
+              </a:spcAft>
+              <a:defRPr sz="1600">
+                <a:solidFill>
+                  <a:srgbClr val="0B0B0B"/>
+                </a:solidFill>
+              </a:defRPr>
+            </a:pPr>
+            <a:r>
+              <a:t>•  User question that caught this: could the 2-3Hz angle rotation just be a sudden camera/rig shift rather than real dynamics? Checked the baseline pixel offset per test: mean y jumped from ~478-480px (0.1-2Hz batch, run ~18:58) to ~379-386px (3-20Hz batch, run ~19:39 onward, after two calibration sweeps at ~19:12-19:16) — a ~100px shift. DAC-y was confirmed unchanged (95) throughout via the printed status line, so this isn't a commanded-position difference.</a:t>
+            </a:r>
+          </a:p>
+          <a:p>
+            <a:pPr>
+              <a:spcAft>
+                <a:spcPts val="1000"/>
+              </a:spcAft>
+              <a:defRPr sz="1600">
+                <a:solidFill>
+                  <a:srgbClr val="0B0B0B"/>
+                </a:solidFill>
+              </a:defRPr>
+            </a:pPr>
+            <a:r>
+              <a:t>•  Decisive test: reran 2Hz alone, standalone, well after the calibration sweeps. Result: offset and angle matched the "high-frequency batch" pattern (~-151°), NOT the original 2Hz result (~-171.5°) — same frequency, different answer. Confirms the shift is tied to elapsed time / an intervening event (most likely the two calibration sweeps, which swing the actuator across nearly its full range), not to test frequency.</a:t>
+            </a:r>
+          </a:p>
+          <a:p>
+            <a:pPr>
+              <a:spcAft>
+                <a:spcPts val="1000"/>
+              </a:spcAft>
+              <a:defRPr sz="1600">
+                <a:solidFill>
+                  <a:srgbClr val="0B0B0B"/>
+                </a:solidFill>
+              </a:defRPr>
+            </a:pPr>
+            <a:r>
+              <a:t>•  The "two mechanical axes have different dynamics" claim on the earlier slides is retracted. Frequency and test order were confounded in that data (tests were run in increasing-frequency order over time) — this is exactly why a clean single-session sweep (next slides) was needed.</a:t>
+            </a:r>
+          </a:p>
+        </p:txBody>
+      </p:sp>
+    </p:spTree>
+  </p:cSld>
+  <p:clrMapOvr>
+    <a:masterClrMapping/>
+  </p:clrMapOvr>
+</p:sld>
+</file>
+
+<file path=ppt/slides/slide15.xml><?xml version="1.0" encoding="utf-8"?>
+<p:sld xmlns:a="http://schemas.openxmlformats.org/drawingml/2006/main" xmlns:p="http://schemas.openxmlformats.org/presentationml/2006/main" xmlns:r="http://schemas.openxmlformats.org/officeDocument/2006/relationships">
+  <p:cSld>
+    <p:spTree>
+      <p:nvGrpSpPr>
+        <p:cNvPr id="1" name=""/>
+        <p:cNvGrpSpPr/>
+        <p:nvPr/>
+      </p:nvGrpSpPr>
+      <p:grpSpPr/>
+      <p:sp>
+        <p:nvSpPr>
+          <p:cNvPr id="2" name="TextBox 1"/>
+          <p:cNvSpPr txBox="1"/>
+          <p:nvPr/>
+        </p:nvSpPr>
+        <p:spPr>
+          <a:xfrm>
+            <a:off x="548640" y="365760"/>
+            <a:ext cx="11064240" cy="914400"/>
+          </a:xfrm>
+          <a:prstGeom prst="rect">
+            <a:avLst/>
+          </a:prstGeom>
+          <a:noFill/>
+        </p:spPr>
+        <p:txBody>
+          <a:bodyPr wrap="square">
+            <a:spAutoFit/>
+          </a:bodyPr>
+          <a:lstStyle/>
+          <a:p>
+            <a:pPr>
+              <a:defRPr sz="2800" b="1">
+                <a:solidFill>
+                  <a:srgbClr val="0B0B0B"/>
+                </a:solidFill>
+              </a:defRPr>
+            </a:pPr>
+            <a:r>
+              <a:t>Clean resweep at 3 amplitudes: the rolloff was mostly a small-signal effect</a:t>
+            </a:r>
+          </a:p>
+          <a:p>
+            <a:pPr>
+              <a:defRPr sz="1400">
+                <a:solidFill>
+                  <a:srgbClr val="52514E"/>
+                </a:solidFill>
+              </a:defRPr>
+            </a:pPr>
+            <a:r>
+              <a:t>Full 0.1-20Hz sweep repeated in one uninterrupted pass at ±200/±400/±800 DAC counts</a:t>
+            </a:r>
+          </a:p>
+        </p:txBody>
+      </p:sp>
+      <p:pic>
+        <p:nvPicPr>
+          <p:cNvPr id="3" name="Picture 2" descr="amplitude_comparison.png"/>
+          <p:cNvPicPr>
+            <a:picLocks noChangeAspect="1"/>
+          </p:cNvPicPr>
+          <p:nvPr/>
+        </p:nvPicPr>
+        <p:blipFill>
+          <a:blip r:embed="rId2"/>
+          <a:stretch>
+            <a:fillRect/>
+          </a:stretch>
+        </p:blipFill>
+        <p:spPr>
+          <a:xfrm>
+            <a:off x="365760" y="1371600"/>
+            <a:ext cx="11430000" cy="4609228"/>
+          </a:xfrm>
+          <a:prstGeom prst="rect">
+            <a:avLst/>
+          </a:prstGeom>
+        </p:spPr>
+      </p:pic>
+    </p:spTree>
+  </p:cSld>
+  <p:clrMapOvr>
+    <a:masterClrMapping/>
+  </p:clrMapOvr>
+</p:sld>
+</file>
+
+<file path=ppt/slides/slide16.xml><?xml version="1.0" encoding="utf-8"?>
+<p:sld xmlns:a="http://schemas.openxmlformats.org/drawingml/2006/main" xmlns:p="http://schemas.openxmlformats.org/presentationml/2006/main" xmlns:r="http://schemas.openxmlformats.org/officeDocument/2006/relationships">
+  <p:cSld>
+    <p:spTree>
+      <p:nvGrpSpPr>
+        <p:cNvPr id="1" name=""/>
+        <p:cNvGrpSpPr/>
+        <p:nvPr/>
+      </p:nvGrpSpPr>
+      <p:grpSpPr/>
+      <p:sp>
+        <p:nvSpPr>
+          <p:cNvPr id="2" name="TextBox 1"/>
+          <p:cNvSpPr txBox="1"/>
+          <p:nvPr/>
+        </p:nvSpPr>
+        <p:spPr>
+          <a:xfrm>
+            <a:off x="548640" y="365760"/>
+            <a:ext cx="11064240" cy="640080"/>
+          </a:xfrm>
+          <a:prstGeom prst="rect">
+            <a:avLst/>
+          </a:prstGeom>
+          <a:noFill/>
+        </p:spPr>
+        <p:txBody>
+          <a:bodyPr wrap="square">
+            <a:spAutoFit/>
+          </a:bodyPr>
+          <a:lstStyle/>
+          <a:p>
+            <a:pPr>
+              <a:defRPr sz="2800" b="1">
+                <a:solidFill>
+                  <a:srgbClr val="0B0B0B"/>
+                </a:solidFill>
+              </a:defRPr>
+            </a:pPr>
+            <a:r>
+              <a:t>What the amplitude comparison means</a:t>
+            </a:r>
+          </a:p>
+        </p:txBody>
+      </p:sp>
+      <p:sp>
+        <p:nvSpPr>
+          <p:cNvPr id="3" name="TextBox 2"/>
+          <p:cNvSpPr txBox="1"/>
+          <p:nvPr/>
+        </p:nvSpPr>
+        <p:spPr>
+          <a:xfrm>
+            <a:off x="731520" y="1554480"/>
+            <a:ext cx="10698480" cy="4572000"/>
+          </a:xfrm>
+          <a:prstGeom prst="rect">
+            <a:avLst/>
+          </a:prstGeom>
+          <a:noFill/>
+        </p:spPr>
+        <p:txBody>
+          <a:bodyPr wrap="square">
+            <a:spAutoFit/>
+          </a:bodyPr>
+          <a:lstStyle/>
+          <a:p>
+            <a:pPr>
+              <a:spcAft>
+                <a:spcPts val="1000"/>
+              </a:spcAft>
+              <a:defRPr sz="1600">
+                <a:solidFill>
+                  <a:srgbClr val="0B0B0B"/>
+                </a:solidFill>
+              </a:defRPr>
+            </a:pPr>
+            <a:r>
+              <a:t>•  % of 0.1Hz magnitude retained at 20Hz: 22% at ±200 counts, 61% at ±400, 69% at ±800 — a completely different answer depending on how hard the actuator is driven.</a:t>
+            </a:r>
+          </a:p>
+          <a:p>
+            <a:pPr>
+              <a:spcAft>
+                <a:spcPts val="1000"/>
+              </a:spcAft>
+              <a:defRPr sz="1600">
+                <a:solidFill>
+                  <a:srgbClr val="0B0B0B"/>
+                </a:solidFill>
+              </a:defRPr>
+            </a:pPr>
+            <a:r>
+              <a:t>•  If the system were linear, doubling amplitude should double the response at every frequency equally (ratio ≈ 2.0×200→400 everywhere). That roughly holds 0.1-9Hz (ratios 1.6-2.3×) but breaks badly at 15Hz (10.8×) and 20Hz (4.9×) — the signature of a nonlinear threshold (stiction/backlash/dead-band), not a linear bandwidth limit.</a:t>
+            </a:r>
+          </a:p>
+          <a:p>
+            <a:pPr>
+              <a:spcAft>
+                <a:spcPts val="1000"/>
+              </a:spcAft>
+              <a:defRPr sz="1600">
+                <a:solidFill>
+                  <a:srgbClr val="0B0B0B"/>
+                </a:solidFill>
+              </a:defRPr>
+            </a:pPr>
+            <a:r>
+              <a:t>•  Read: at small commanded amplitude, the actuator apparently can't generate enough force fast enough to break through some threshold at 15-20Hz, so it barely moves. At larger amplitude there's enough "push" to get past it, and the response recovers substantially (though not completely — even at ±800, 20Hz retains only ~69%, so there IS still some real rolloff, just far less severe than ±200 suggested).</a:t>
+            </a:r>
+          </a:p>
+          <a:p>
+            <a:pPr>
+              <a:spcAft>
+                <a:spcPts val="1000"/>
+              </a:spcAft>
+              <a:defRPr sz="1600">
+                <a:solidFill>
+                  <a:srgbClr val="0B0B0B"/>
+                </a:solidFill>
+              </a:defRPr>
+            </a:pPr>
+            <a:r>
+              <a:t>•  Bonus confirmation: angle stayed stable (~-146 to -157°) across ALL 16 frequencies in BOTH clean amplitude sweeps — further confirming the earlier "axis rotation" finding was a batch artifact, not real.</a:t>
+            </a:r>
+          </a:p>
+          <a:p>
+            <a:pPr>
+              <a:spcAft>
+                <a:spcPts val="1000"/>
+              </a:spcAft>
+              <a:defRPr sz="1600">
+                <a:solidFill>
+                  <a:srgbClr val="0B0B0B"/>
+                </a:solidFill>
+              </a:defRPr>
+            </a:pPr>
+            <a:r>
+              <a:t>•  Practical implication, not yet resolved: which amplitude regime matters depends on how large the actual beacon-wobble disturbance is in DAC-equivalent terms. If real disturbances are small, the controller may still fight this stiction effect in practice (possibly needing a small dither signal to stay unstuck) even though large-signal bandwidth looks much healthier than first measured.</a:t>
             </a:r>
           </a:p>
         </p:txBody>

--- a/docs/session_results_2026-08-04.pptx
+++ b/docs/session_results_2026-08-04.pptx
@@ -21,6 +21,7 @@
     <p:sldId id="269" r:id="rId20"/>
     <p:sldId id="270" r:id="rId21"/>
     <p:sldId id="271" r:id="rId22"/>
+    <p:sldId id="272" r:id="rId23"/>
   </p:sldIdLst>
   <p:sldSz cx="12191695" cy="6858000" type="screen4x3"/>
   <p:notesSz cx="6858000" cy="9144000"/>
@@ -4634,6 +4635,438 @@
             </a:pPr>
             <a:r>
               <a:t>•  Practical implication, not yet resolved: which amplitude regime matters depends on how large the actual beacon-wobble disturbance is in DAC-equivalent terms. If real disturbances are small, the controller may still fight this stiction effect in practice (possibly needing a small dither signal to stay unstuck) even though large-signal bandwidth looks much healthier than first measured.</a:t>
+            </a:r>
+          </a:p>
+        </p:txBody>
+      </p:sp>
+    </p:spTree>
+  </p:cSld>
+  <p:clrMapOvr>
+    <a:masterClrMapping/>
+  </p:clrMapOvr>
+</p:sld>
+</file>
+
+<file path=ppt/slides/slide17.xml><?xml version="1.0" encoding="utf-8"?>
+<p:sld xmlns:a="http://schemas.openxmlformats.org/drawingml/2006/main" xmlns:p="http://schemas.openxmlformats.org/presentationml/2006/main" xmlns:r="http://schemas.openxmlformats.org/officeDocument/2006/relationships">
+  <p:cSld>
+    <p:spTree>
+      <p:nvGrpSpPr>
+        <p:cNvPr id="1" name=""/>
+        <p:cNvGrpSpPr/>
+        <p:nvPr/>
+      </p:nvGrpSpPr>
+      <p:grpSpPr/>
+      <p:sp>
+        <p:nvSpPr>
+          <p:cNvPr id="2" name="TextBox 1"/>
+          <p:cNvSpPr txBox="1"/>
+          <p:nvPr/>
+        </p:nvSpPr>
+        <p:spPr>
+          <a:xfrm>
+            <a:off x="548640" y="365760"/>
+            <a:ext cx="11064240" cy="914400"/>
+          </a:xfrm>
+          <a:prstGeom prst="rect">
+            <a:avLst/>
+          </a:prstGeom>
+          <a:noFill/>
+        </p:spPr>
+        <p:txBody>
+          <a:bodyPr wrap="square">
+            <a:spAutoFit/>
+          </a:bodyPr>
+          <a:lstStyle/>
+          <a:p>
+            <a:pPr>
+              <a:defRPr sz="2800" b="1">
+                <a:solidFill>
+                  <a:srgbClr val="0B0B0B"/>
+                </a:solidFill>
+              </a:defRPr>
+            </a:pPr>
+            <a:r>
+              <a:t>FTA amplifier static calibration — both axes</a:t>
+            </a:r>
+          </a:p>
+          <a:p>
+            <a:pPr>
+              <a:defRPr sz="1400">
+                <a:solidFill>
+                  <a:srgbClr val="52514E"/>
+                </a:solidFill>
+              </a:defRPr>
+            </a:pPr>
+            <a:r>
+              <a:t>DAC counts ↔ amplifier output voltage, R=2.85Ω load</a:t>
+            </a:r>
+          </a:p>
+        </p:txBody>
+      </p:sp>
+      <p:pic>
+        <p:nvPicPr>
+          <p:cNvPr id="3" name="Picture 2" descr="fta_amp_voltage_calibration.png"/>
+          <p:cNvPicPr>
+            <a:picLocks noChangeAspect="1"/>
+          </p:cNvPicPr>
+          <p:nvPr/>
+        </p:nvPicPr>
+        <p:blipFill>
+          <a:blip r:embed="rId2"/>
+          <a:stretch>
+            <a:fillRect/>
+          </a:stretch>
+        </p:blipFill>
+        <p:spPr>
+          <a:xfrm>
+            <a:off x="2651760" y="1097280"/>
+            <a:ext cx="7507705" cy="5486400"/>
+          </a:xfrm>
+          <a:prstGeom prst="rect">
+            <a:avLst/>
+          </a:prstGeom>
+        </p:spPr>
+      </p:pic>
+      <p:graphicFrame>
+        <p:nvGraphicFramePr>
+          <p:cNvPr id="4" name="Table 3"/>
+          <p:cNvGraphicFramePr>
+            <a:graphicFrameLocks noGrp="1"/>
+          </p:cNvGraphicFramePr>
+          <p:nvPr/>
+        </p:nvGraphicFramePr>
+        <p:xfrm>
+          <a:off x="274320" y="1280160"/>
+          <a:ext cx="2286000" cy="1371600"/>
+        </p:xfrm>
+        <a:graphic>
+          <a:graphicData uri="http://schemas.openxmlformats.org/drawingml/2006/table">
+            <a:tbl>
+              <a:tblPr firstRow="1" bandRow="1">
+                <a:tableStyleId>{5C22544A-7EE6-4342-B048-85BDC9FD1C3A}</a:tableStyleId>
+              </a:tblPr>
+              <a:tblGrid>
+                <a:gridCol w="502920"/>
+                <a:gridCol w="594360"/>
+                <a:gridCol w="594360"/>
+                <a:gridCol w="594360"/>
+              </a:tblGrid>
+              <a:tr h="457200">
+                <a:tc>
+                  <a:txBody>
+                    <a:bodyPr/>
+                    <a:lstStyle/>
+                    <a:p>
+                      <a:pPr>
+                        <a:defRPr b="1" sz="1100">
+                          <a:solidFill>
+                            <a:srgbClr val="FFFFFF"/>
+                          </a:solidFill>
+                        </a:defRPr>
+                      </a:pPr>
+                    </a:p>
+                  </a:txBody>
+                  <a:tcPr>
+                    <a:solidFill>
+                      <a:srgbClr val="2A78D6"/>
+                    </a:solidFill>
+                  </a:tcPr>
+                </a:tc>
+                <a:tc>
+                  <a:txBody>
+                    <a:bodyPr/>
+                    <a:lstStyle/>
+                    <a:p>
+                      <a:pPr>
+                        <a:defRPr b="1" sz="1100">
+                          <a:solidFill>
+                            <a:srgbClr val="FFFFFF"/>
+                          </a:solidFill>
+                        </a:defRPr>
+                      </a:pPr>
+                      <a:r>
+                        <a:t>R²</a:t>
+                      </a:r>
+                    </a:p>
+                  </a:txBody>
+                  <a:tcPr>
+                    <a:solidFill>
+                      <a:srgbClr val="2A78D6"/>
+                    </a:solidFill>
+                  </a:tcPr>
+                </a:tc>
+                <a:tc>
+                  <a:txBody>
+                    <a:bodyPr/>
+                    <a:lstStyle/>
+                    <a:p>
+                      <a:pPr>
+                        <a:defRPr b="1" sz="1100">
+                          <a:solidFill>
+                            <a:srgbClr val="FFFFFF"/>
+                          </a:solidFill>
+                        </a:defRPr>
+                      </a:pPr>
+                      <a:r>
+                        <a:t>counts/V</a:t>
+                      </a:r>
+                    </a:p>
+                  </a:txBody>
+                  <a:tcPr>
+                    <a:solidFill>
+                      <a:srgbClr val="2A78D6"/>
+                    </a:solidFill>
+                  </a:tcPr>
+                </a:tc>
+                <a:tc>
+                  <a:txBody>
+                    <a:bodyPr/>
+                    <a:lstStyle/>
+                    <a:p>
+                      <a:pPr>
+                        <a:defRPr b="1" sz="1100">
+                          <a:solidFill>
+                            <a:srgbClr val="FFFFFF"/>
+                          </a:solidFill>
+                        </a:defRPr>
+                      </a:pPr>
+                      <a:r>
+                        <a:t>counts/A</a:t>
+                      </a:r>
+                    </a:p>
+                  </a:txBody>
+                  <a:tcPr>
+                    <a:solidFill>
+                      <a:srgbClr val="2A78D6"/>
+                    </a:solidFill>
+                  </a:tcPr>
+                </a:tc>
+              </a:tr>
+              <a:tr h="457200">
+                <a:tc>
+                  <a:txBody>
+                    <a:bodyPr/>
+                    <a:lstStyle/>
+                    <a:p>
+                      <a:pPr>
+                        <a:defRPr sz="1100">
+                          <a:solidFill>
+                            <a:srgbClr val="0B0B0B"/>
+                          </a:solidFill>
+                        </a:defRPr>
+                      </a:pPr>
+                      <a:r>
+                        <a:t>X</a:t>
+                      </a:r>
+                    </a:p>
+                  </a:txBody>
+                  <a:tcPr/>
+                </a:tc>
+                <a:tc>
+                  <a:txBody>
+                    <a:bodyPr/>
+                    <a:lstStyle/>
+                    <a:p>
+                      <a:pPr>
+                        <a:defRPr sz="1100">
+                          <a:solidFill>
+                            <a:srgbClr val="0B0B0B"/>
+                          </a:solidFill>
+                        </a:defRPr>
+                      </a:pPr>
+                      <a:r>
+                        <a:t>1.0000</a:t>
+                      </a:r>
+                    </a:p>
+                  </a:txBody>
+                  <a:tcPr/>
+                </a:tc>
+                <a:tc>
+                  <a:txBody>
+                    <a:bodyPr/>
+                    <a:lstStyle/>
+                    <a:p>
+                      <a:pPr>
+                        <a:defRPr sz="1100">
+                          <a:solidFill>
+                            <a:srgbClr val="0B0B0B"/>
+                          </a:solidFill>
+                        </a:defRPr>
+                      </a:pPr>
+                      <a:r>
+                        <a:t>-1365</a:t>
+                      </a:r>
+                    </a:p>
+                  </a:txBody>
+                  <a:tcPr/>
+                </a:tc>
+                <a:tc>
+                  <a:txBody>
+                    <a:bodyPr/>
+                    <a:lstStyle/>
+                    <a:p>
+                      <a:pPr>
+                        <a:defRPr sz="1100">
+                          <a:solidFill>
+                            <a:srgbClr val="0B0B0B"/>
+                          </a:solidFill>
+                        </a:defRPr>
+                      </a:pPr>
+                      <a:r>
+                        <a:t>-3891</a:t>
+                      </a:r>
+                    </a:p>
+                  </a:txBody>
+                  <a:tcPr/>
+                </a:tc>
+              </a:tr>
+              <a:tr h="457200">
+                <a:tc>
+                  <a:txBody>
+                    <a:bodyPr/>
+                    <a:lstStyle/>
+                    <a:p>
+                      <a:pPr>
+                        <a:defRPr sz="1100">
+                          <a:solidFill>
+                            <a:srgbClr val="0B0B0B"/>
+                          </a:solidFill>
+                        </a:defRPr>
+                      </a:pPr>
+                      <a:r>
+                        <a:t>Y</a:t>
+                      </a:r>
+                    </a:p>
+                  </a:txBody>
+                  <a:tcPr/>
+                </a:tc>
+                <a:tc>
+                  <a:txBody>
+                    <a:bodyPr/>
+                    <a:lstStyle/>
+                    <a:p>
+                      <a:pPr>
+                        <a:defRPr sz="1100">
+                          <a:solidFill>
+                            <a:srgbClr val="0B0B0B"/>
+                          </a:solidFill>
+                        </a:defRPr>
+                      </a:pPr>
+                      <a:r>
+                        <a:t>0.9971</a:t>
+                      </a:r>
+                    </a:p>
+                  </a:txBody>
+                  <a:tcPr/>
+                </a:tc>
+                <a:tc>
+                  <a:txBody>
+                    <a:bodyPr/>
+                    <a:lstStyle/>
+                    <a:p>
+                      <a:pPr>
+                        <a:defRPr sz="1100">
+                          <a:solidFill>
+                            <a:srgbClr val="0B0B0B"/>
+                          </a:solidFill>
+                        </a:defRPr>
+                      </a:pPr>
+                      <a:r>
+                        <a:t>-1276</a:t>
+                      </a:r>
+                    </a:p>
+                  </a:txBody>
+                  <a:tcPr/>
+                </a:tc>
+                <a:tc>
+                  <a:txBody>
+                    <a:bodyPr/>
+                    <a:lstStyle/>
+                    <a:p>
+                      <a:pPr>
+                        <a:defRPr sz="1100">
+                          <a:solidFill>
+                            <a:srgbClr val="0B0B0B"/>
+                          </a:solidFill>
+                        </a:defRPr>
+                      </a:pPr>
+                      <a:r>
+                        <a:t>-3636</a:t>
+                      </a:r>
+                    </a:p>
+                  </a:txBody>
+                  <a:tcPr/>
+                </a:tc>
+              </a:tr>
+            </a:tbl>
+          </a:graphicData>
+        </a:graphic>
+      </p:graphicFrame>
+      <p:sp>
+        <p:nvSpPr>
+          <p:cNvPr id="5" name="TextBox 4"/>
+          <p:cNvSpPr txBox="1"/>
+          <p:nvPr/>
+        </p:nvSpPr>
+        <p:spPr>
+          <a:xfrm>
+            <a:off x="250838208000" y="3595347648000"/>
+            <a:ext cx="2090318400000" cy="2424769344000"/>
+          </a:xfrm>
+          <a:prstGeom prst="rect">
+            <a:avLst/>
+          </a:prstGeom>
+          <a:noFill/>
+        </p:spPr>
+        <p:txBody>
+          <a:bodyPr wrap="square">
+            <a:spAutoFit/>
+          </a:bodyPr>
+          <a:lstStyle/>
+          <a:p>
+            <a:pPr>
+              <a:spcAft>
+                <a:spcPts val="1000"/>
+              </a:spcAft>
+              <a:defRPr sz="1150">
+                <a:solidFill>
+                  <a:srgbClr val="0B0B0B"/>
+                </a:solidFill>
+              </a:defRPr>
+            </a:pPr>
+            <a:r>
+              <a:t>•  Both axes are highly linear statically (R²=1.0000 X, 0.9971 Y) — no visible kink or dead-band across the full 200-4000 DAC range.</a:t>
+            </a:r>
+          </a:p>
+          <a:p>
+            <a:pPr>
+              <a:spcAft>
+                <a:spcPts val="1000"/>
+              </a:spcAft>
+              <a:defRPr sz="1150">
+                <a:solidFill>
+                  <a:srgbClr val="0B0B0B"/>
+                </a:solidFill>
+              </a:defRPr>
+            </a:pPr>
+            <a:r>
+              <a:t>•  counts/V and counts/A are negative because voltage decreases as DAC counts increase on both axes (same sign convention already established from the step-response/sine-tracking data).</a:t>
+            </a:r>
+          </a:p>
+          <a:p>
+            <a:pPr>
+              <a:spcAft>
+                <a:spcPts val="1000"/>
+              </a:spcAft>
+              <a:defRPr sz="1150">
+                <a:solidFill>
+                  <a:srgbClr val="0B0B0B"/>
+                </a:solidFill>
+              </a:defRPr>
+            </a:pPr>
+            <a:r>
+              <a:t>•  Complementary evidence for the sine-tracking amplitude-comparison finding: since the DAC/amp stage is this linear when swept slowly, the dynamic nonlinear threshold seen at 15-20Hz more likely lives in actuator mechanics or a frequency-dependent electrical effect, not simple DC nonlinearity here.</a:t>
             </a:r>
           </a:p>
         </p:txBody>

--- a/docs/session_results_2026-08-04.pptx
+++ b/docs/session_results_2026-08-04.pptx
@@ -22,6 +22,7 @@
     <p:sldId id="270" r:id="rId21"/>
     <p:sldId id="271" r:id="rId22"/>
     <p:sldId id="272" r:id="rId23"/>
+    <p:sldId id="273" r:id="rId24"/>
   </p:sldIdLst>
   <p:sldSz cx="12191695" cy="6858000" type="screen4x3"/>
   <p:notesSz cx="6858000" cy="9144000"/>
@@ -5067,6 +5068,163 @@
             </a:pPr>
             <a:r>
               <a:t>•  Complementary evidence for the sine-tracking amplitude-comparison finding: since the DAC/amp stage is this linear when swept slowly, the dynamic nonlinear threshold seen at 15-20Hz more likely lives in actuator mechanics or a frequency-dependent electrical effect, not simple DC nonlinearity here.</a:t>
+            </a:r>
+          </a:p>
+        </p:txBody>
+      </p:sp>
+    </p:spTree>
+  </p:cSld>
+  <p:clrMapOvr>
+    <a:masterClrMapping/>
+  </p:clrMapOvr>
+</p:sld>
+</file>
+
+<file path=ppt/slides/slide18.xml><?xml version="1.0" encoding="utf-8"?>
+<p:sld xmlns:a="http://schemas.openxmlformats.org/drawingml/2006/main" xmlns:p="http://schemas.openxmlformats.org/presentationml/2006/main" xmlns:r="http://schemas.openxmlformats.org/officeDocument/2006/relationships">
+  <p:cSld>
+    <p:spTree>
+      <p:nvGrpSpPr>
+        <p:cNvPr id="1" name=""/>
+        <p:cNvGrpSpPr/>
+        <p:nvPr/>
+      </p:nvGrpSpPr>
+      <p:grpSpPr/>
+      <p:sp>
+        <p:nvSpPr>
+          <p:cNvPr id="2" name="TextBox 1"/>
+          <p:cNvSpPr txBox="1"/>
+          <p:nvPr/>
+        </p:nvSpPr>
+        <p:spPr>
+          <a:xfrm>
+            <a:off x="548640" y="365760"/>
+            <a:ext cx="11064240" cy="914400"/>
+          </a:xfrm>
+          <a:prstGeom prst="rect">
+            <a:avLst/>
+          </a:prstGeom>
+          <a:noFill/>
+        </p:spPr>
+        <p:txBody>
+          <a:bodyPr wrap="square">
+            <a:spAutoFit/>
+          </a:bodyPr>
+          <a:lstStyle/>
+          <a:p>
+            <a:pPr>
+              <a:defRPr sz="2800" b="1">
+                <a:solidFill>
+                  <a:srgbClr val="0B0B0B"/>
+                </a:solidFill>
+              </a:defRPr>
+            </a:pPr>
+            <a:r>
+              <a:t>Where does the centroid actually stop moving?</a:t>
+            </a:r>
+          </a:p>
+          <a:p>
+            <a:pPr>
+              <a:defRPr sz="1400">
+                <a:solidFill>
+                  <a:srgbClr val="52514E"/>
+                </a:solidFill>
+              </a:defRPr>
+            </a:pPr>
+            <a:r>
+              <a:t>Calibration sweep (DAC→centroid) combined with the amplifier power fit</a:t>
+            </a:r>
+          </a:p>
+        </p:txBody>
+      </p:sp>
+      <p:pic>
+        <p:nvPicPr>
+          <p:cNvPr id="3" name="Picture 2" descr="fta_travel_range_analysis.png"/>
+          <p:cNvPicPr>
+            <a:picLocks noChangeAspect="1"/>
+          </p:cNvPicPr>
+          <p:nvPr/>
+        </p:nvPicPr>
+        <p:blipFill>
+          <a:blip r:embed="rId2"/>
+          <a:stretch>
+            <a:fillRect/>
+          </a:stretch>
+        </p:blipFill>
+        <p:spPr>
+          <a:xfrm>
+            <a:off x="3337560" y="1188720"/>
+            <a:ext cx="5745479" cy="3977639"/>
+          </a:xfrm>
+          <a:prstGeom prst="rect">
+            <a:avLst/>
+          </a:prstGeom>
+        </p:spPr>
+      </p:pic>
+      <p:sp>
+        <p:nvSpPr>
+          <p:cNvPr id="4" name="TextBox 3"/>
+          <p:cNvSpPr txBox="1"/>
+          <p:nvPr/>
+        </p:nvSpPr>
+        <p:spPr>
+          <a:xfrm>
+            <a:off x="418063680000" y="4849538688000"/>
+            <a:ext cx="10284366528000" cy="1254191040000"/>
+          </a:xfrm>
+          <a:prstGeom prst="rect">
+            <a:avLst/>
+          </a:prstGeom>
+          <a:noFill/>
+        </p:spPr>
+        <p:txBody>
+          <a:bodyPr wrap="square">
+            <a:spAutoFit/>
+          </a:bodyPr>
+          <a:lstStyle/>
+          <a:p>
+            <a:pPr>
+              <a:spcAft>
+                <a:spcPts val="1000"/>
+              </a:spcAft>
+              <a:defRPr sz="1300">
+                <a:solidFill>
+                  <a:srgbClr val="0B0B0B"/>
+                </a:solidFill>
+              </a:defRPr>
+            </a:pPr>
+            <a:r>
+              <a:t>•  X axis: cx tracks dac_x linearly across the ENTIRE tested range (200-3800) — no flattening at either end, still responding right up to both extremes.</a:t>
+            </a:r>
+          </a:p>
+          <a:p>
+            <a:pPr>
+              <a:spcAft>
+                <a:spcPts val="1000"/>
+              </a:spcAft>
+              <a:defRPr sz="1300">
+                <a:solidFill>
+                  <a:srgbClr val="0B0B0B"/>
+                </a:solidFill>
+              </a:defRPr>
+            </a:pPr>
+            <a:r>
+              <a:t>•  Y axis: cy rises steeply from dac_y=200→~500 (~0.028 px/count), then flattens almost completely for the rest of the range 500-3800 (~0.003 mid-range, ~0.0015 at the high end — a 94-95% sensitivity drop) while power keeps climbing to ~850mW at the far end.</a:t>
+            </a:r>
+          </a:p>
+          <a:p>
+            <a:pPr>
+              <a:spcAft>
+                <a:spcPts val="1000"/>
+              </a:spcAft>
+              <a:defRPr sz="1300">
+                <a:solidFill>
+                  <a:srgbClr val="0B0B0B"/>
+                </a:solidFill>
+              </a:defRPr>
+            </a:pPr>
+            <a:r>
+              <a:t>•  Read: the Y axis's real useful travel is only about DAC 200-500/800 — a small fraction of what was swept. Past that, DAC-y commands spend power for essentially zero additional beam movement, consistent with hitting a real mechanical limit early.</a:t>
             </a:r>
           </a:p>
         </p:txBody>

--- a/docs/session_results_2026-08-04.pptx
+++ b/docs/session_results_2026-08-04.pptx
@@ -23,6 +23,8 @@
     <p:sldId id="271" r:id="rId22"/>
     <p:sldId id="272" r:id="rId23"/>
     <p:sldId id="273" r:id="rId24"/>
+    <p:sldId id="274" r:id="rId25"/>
+    <p:sldId id="275" r:id="rId26"/>
   </p:sldIdLst>
   <p:sldSz cx="12191695" cy="6858000" type="screen4x3"/>
   <p:notesSz cx="6858000" cy="9144000"/>
@@ -5237,6 +5239,95 @@
 </p:sld>
 </file>
 
+<file path=ppt/slides/slide19.xml><?xml version="1.0" encoding="utf-8"?>
+<p:sld xmlns:a="http://schemas.openxmlformats.org/drawingml/2006/main" xmlns:p="http://schemas.openxmlformats.org/presentationml/2006/main" xmlns:r="http://schemas.openxmlformats.org/officeDocument/2006/relationships">
+  <p:cSld>
+    <p:spTree>
+      <p:nvGrpSpPr>
+        <p:cNvPr id="1" name=""/>
+        <p:cNvGrpSpPr/>
+        <p:nvPr/>
+      </p:nvGrpSpPr>
+      <p:grpSpPr/>
+      <p:sp>
+        <p:nvSpPr>
+          <p:cNvPr id="2" name="TextBox 1"/>
+          <p:cNvSpPr txBox="1"/>
+          <p:nvPr/>
+        </p:nvSpPr>
+        <p:spPr>
+          <a:xfrm>
+            <a:off x="548640" y="365760"/>
+            <a:ext cx="11064240" cy="914400"/>
+          </a:xfrm>
+          <a:prstGeom prst="rect">
+            <a:avLst/>
+          </a:prstGeom>
+          <a:noFill/>
+        </p:spPr>
+        <p:txBody>
+          <a:bodyPr wrap="square">
+            <a:spAutoFit/>
+          </a:bodyPr>
+          <a:lstStyle/>
+          <a:p>
+            <a:pPr>
+              <a:defRPr sz="2800" b="1">
+                <a:solidFill>
+                  <a:srgbClr val="0B0B0B"/>
+                </a:solidFill>
+              </a:defRPr>
+            </a:pPr>
+            <a:r>
+              <a:t>Same view as slide 10, at ±400 DAC counts</a:t>
+            </a:r>
+          </a:p>
+          <a:p>
+            <a:pPr>
+              <a:defRPr sz="1400">
+                <a:solidFill>
+                  <a:srgbClr val="52514E"/>
+                </a:solidFill>
+              </a:defRPr>
+            </a:pPr>
+            <a:r>
+              <a:t>Projected onto the actuator's fitted motion axis, not the camera's x/y axes</a:t>
+            </a:r>
+          </a:p>
+        </p:txBody>
+      </p:sp>
+      <p:pic>
+        <p:nvPicPr>
+          <p:cNvPr id="3" name="Picture 2" descr="sine_highfreq_rotated_amp400.png"/>
+          <p:cNvPicPr>
+            <a:picLocks noChangeAspect="1"/>
+          </p:cNvPicPr>
+          <p:nvPr/>
+        </p:nvPicPr>
+        <p:blipFill>
+          <a:blip r:embed="rId2"/>
+          <a:stretch>
+            <a:fillRect/>
+          </a:stretch>
+        </p:blipFill>
+        <p:spPr>
+          <a:xfrm>
+            <a:off x="320040" y="1234440"/>
+            <a:ext cx="11521440" cy="6606377"/>
+          </a:xfrm>
+          <a:prstGeom prst="rect">
+            <a:avLst/>
+          </a:prstGeom>
+        </p:spPr>
+      </p:pic>
+    </p:spTree>
+  </p:cSld>
+  <p:clrMapOvr>
+    <a:masterClrMapping/>
+  </p:clrMapOvr>
+</p:sld>
+</file>
+
 <file path=ppt/slides/slide2.xml><?xml version="1.0" encoding="utf-8"?>
 <p:sld xmlns:a="http://schemas.openxmlformats.org/drawingml/2006/main" xmlns:p="http://schemas.openxmlformats.org/presentationml/2006/main" xmlns:r="http://schemas.openxmlformats.org/officeDocument/2006/relationships">
   <p:cSld>
@@ -5380,6 +5471,95 @@
           </a:p>
         </p:txBody>
       </p:sp>
+    </p:spTree>
+  </p:cSld>
+  <p:clrMapOvr>
+    <a:masterClrMapping/>
+  </p:clrMapOvr>
+</p:sld>
+</file>
+
+<file path=ppt/slides/slide20.xml><?xml version="1.0" encoding="utf-8"?>
+<p:sld xmlns:a="http://schemas.openxmlformats.org/drawingml/2006/main" xmlns:p="http://schemas.openxmlformats.org/presentationml/2006/main" xmlns:r="http://schemas.openxmlformats.org/officeDocument/2006/relationships">
+  <p:cSld>
+    <p:spTree>
+      <p:nvGrpSpPr>
+        <p:cNvPr id="1" name=""/>
+        <p:cNvGrpSpPr/>
+        <p:nvPr/>
+      </p:nvGrpSpPr>
+      <p:grpSpPr/>
+      <p:sp>
+        <p:nvSpPr>
+          <p:cNvPr id="2" name="TextBox 1"/>
+          <p:cNvSpPr txBox="1"/>
+          <p:nvPr/>
+        </p:nvSpPr>
+        <p:spPr>
+          <a:xfrm>
+            <a:off x="548640" y="365760"/>
+            <a:ext cx="11064240" cy="914400"/>
+          </a:xfrm>
+          <a:prstGeom prst="rect">
+            <a:avLst/>
+          </a:prstGeom>
+          <a:noFill/>
+        </p:spPr>
+        <p:txBody>
+          <a:bodyPr wrap="square">
+            <a:spAutoFit/>
+          </a:bodyPr>
+          <a:lstStyle/>
+          <a:p>
+            <a:pPr>
+              <a:defRPr sz="2800" b="1">
+                <a:solidFill>
+                  <a:srgbClr val="0B0B0B"/>
+                </a:solidFill>
+              </a:defRPr>
+            </a:pPr>
+            <a:r>
+              <a:t>Same view as slide 10, at ±800 DAC counts</a:t>
+            </a:r>
+          </a:p>
+          <a:p>
+            <a:pPr>
+              <a:defRPr sz="1400">
+                <a:solidFill>
+                  <a:srgbClr val="52514E"/>
+                </a:solidFill>
+              </a:defRPr>
+            </a:pPr>
+            <a:r>
+              <a:t>Projected onto the actuator's fitted motion axis, not the camera's x/y axes</a:t>
+            </a:r>
+          </a:p>
+        </p:txBody>
+      </p:sp>
+      <p:pic>
+        <p:nvPicPr>
+          <p:cNvPr id="3" name="Picture 2" descr="sine_highfreq_rotated_amp800.png"/>
+          <p:cNvPicPr>
+            <a:picLocks noChangeAspect="1"/>
+          </p:cNvPicPr>
+          <p:nvPr/>
+        </p:nvPicPr>
+        <p:blipFill>
+          <a:blip r:embed="rId2"/>
+          <a:stretch>
+            <a:fillRect/>
+          </a:stretch>
+        </p:blipFill>
+        <p:spPr>
+          <a:xfrm>
+            <a:off x="320040" y="1234440"/>
+            <a:ext cx="11521440" cy="6606377"/>
+          </a:xfrm>
+          <a:prstGeom prst="rect">
+            <a:avLst/>
+          </a:prstGeom>
+        </p:spPr>
+      </p:pic>
     </p:spTree>
   </p:cSld>
   <p:clrMapOvr>

--- a/docs/session_results_2026-08-04.pptx
+++ b/docs/session_results_2026-08-04.pptx
@@ -25,6 +25,9 @@
     <p:sldId id="273" r:id="rId24"/>
     <p:sldId id="274" r:id="rId25"/>
     <p:sldId id="275" r:id="rId26"/>
+    <p:sldId id="276" r:id="rId27"/>
+    <p:sldId id="277" r:id="rId28"/>
+    <p:sldId id="278" r:id="rId29"/>
   </p:sldIdLst>
   <p:sldSz cx="12191695" cy="6858000" type="screen4x3"/>
   <p:notesSz cx="6858000" cy="9144000"/>
@@ -5560,6 +5563,492 @@
           </a:prstGeom>
         </p:spPr>
       </p:pic>
+    </p:spTree>
+  </p:cSld>
+  <p:clrMapOvr>
+    <a:masterClrMapping/>
+  </p:clrMapOvr>
+</p:sld>
+</file>
+
+<file path=ppt/slides/slide21.xml><?xml version="1.0" encoding="utf-8"?>
+<p:sld xmlns:a="http://schemas.openxmlformats.org/drawingml/2006/main" xmlns:p="http://schemas.openxmlformats.org/presentationml/2006/main" xmlns:r="http://schemas.openxmlformats.org/officeDocument/2006/relationships">
+  <p:cSld>
+    <p:spTree>
+      <p:nvGrpSpPr>
+        <p:cNvPr id="1" name=""/>
+        <p:cNvGrpSpPr/>
+        <p:nvPr/>
+      </p:nvGrpSpPr>
+      <p:grpSpPr/>
+      <p:sp>
+        <p:nvSpPr>
+          <p:cNvPr id="2" name="TextBox 1"/>
+          <p:cNvSpPr txBox="1"/>
+          <p:nvPr/>
+        </p:nvSpPr>
+        <p:spPr>
+          <a:xfrm>
+            <a:off x="548640" y="365760"/>
+            <a:ext cx="11064240" cy="914400"/>
+          </a:xfrm>
+          <a:prstGeom prst="rect">
+            <a:avLst/>
+          </a:prstGeom>
+          <a:noFill/>
+        </p:spPr>
+        <p:txBody>
+          <a:bodyPr wrap="square">
+            <a:spAutoFit/>
+          </a:bodyPr>
+          <a:lstStyle/>
+          <a:p>
+            <a:pPr>
+              <a:defRPr sz="2800" b="1">
+                <a:solidFill>
+                  <a:srgbClr val="0B0B0B"/>
+                </a:solidFill>
+              </a:defRPr>
+            </a:pPr>
+            <a:r>
+              <a:t>RETRACTED: slide 18's Y-axis travel limit was a dropped-command bug</a:t>
+            </a:r>
+          </a:p>
+          <a:p>
+            <a:pPr>
+              <a:defRPr sz="1400">
+                <a:solidFill>
+                  <a:srgbClr val="52514E"/>
+                </a:solidFill>
+              </a:defRPr>
+            </a:pPr>
+            <a:r>
+              <a:t>fta_calibration_vcp.py fired set_x then set_y with no wait -- the firmware's one-line VCP buffer silently dropped set_y</a:t>
+            </a:r>
+          </a:p>
+        </p:txBody>
+      </p:sp>
+      <p:sp>
+        <p:nvSpPr>
+          <p:cNvPr id="3" name="TextBox 2"/>
+          <p:cNvSpPr txBox="1"/>
+          <p:nvPr/>
+        </p:nvSpPr>
+        <p:spPr>
+          <a:xfrm>
+            <a:off x="501676416000" y="1463222880000"/>
+            <a:ext cx="10117141056000" cy="4431475008000"/>
+          </a:xfrm>
+          <a:prstGeom prst="rect">
+            <a:avLst/>
+          </a:prstGeom>
+          <a:noFill/>
+        </p:spPr>
+        <p:txBody>
+          <a:bodyPr wrap="square">
+            <a:spAutoFit/>
+          </a:bodyPr>
+          <a:lstStyle/>
+          <a:p>
+            <a:pPr>
+              <a:spcAft>
+                <a:spcPts val="1000"/>
+              </a:spcAft>
+              <a:defRPr sz="1500">
+                <a:solidFill>
+                  <a:srgbClr val="0B0B0B"/>
+                </a:solidFill>
+              </a:defRPr>
+            </a:pPr>
+            <a:r>
+              <a:t>•  Symptom: re-running the grid sweep after switching to full-frame, the beam visibly moved on only ONE axis at a time -- manual set_x/set_y control clearly worked on both.</a:t>
+            </a:r>
+          </a:p>
+          <a:p>
+            <a:pPr>
+              <a:spcAft>
+                <a:spcPts val="1000"/>
+              </a:spcAft>
+              <a:defRPr sz="1500">
+                <a:solidFill>
+                  <a:srgbClr val="0B0B0B"/>
+                </a:solidFill>
+              </a:defRPr>
+            </a:pPr>
+            <a:r>
+              <a:t>•  Root cause (main.c HAL_UART_RxCpltCallback): the firmware buffers exactly one pending VCP command line at a time. A new command's bytes arriving before the previous line's reply is drained by the main loop are silently dropped -- no error, no signal.</a:t>
+            </a:r>
+          </a:p>
+          <a:p>
+            <a:pPr>
+              <a:spcAft>
+                <a:spcPts val="1000"/>
+              </a:spcAft>
+              <a:defRPr sz="1500">
+                <a:solidFill>
+                  <a:srgbClr val="0B0B0B"/>
+                </a:solidFill>
+              </a:defRPr>
+            </a:pPr>
+            <a:r>
+              <a:t>•  fta_calibration_vcp.py wrote set_x then immediately set_y with zero delay and never read either reply. set_x (sent first) almost always landed; set_y frequently got dropped while set_x's OK reply was still pending -- silently sticking dac_y while dac_x kept updating.</a:t>
+            </a:r>
+          </a:p>
+          <a:p>
+            <a:pPr>
+              <a:spcAft>
+                <a:spcPts val="1000"/>
+              </a:spcAft>
+              <a:defRPr sz="1500">
+                <a:solidFill>
+                  <a:srgbClr val="0B0B0B"/>
+                </a:solidFill>
+              </a:defRPr>
+            </a:pPr>
+            <a:r>
+              <a:t>•  This affected every automated calibration grid sweep this session, including the one behind slide 18. fta_manual_control.py was never affected -- it already waits for each reply before sending the next command, which is exactly why manual control looked fine.</a:t>
+            </a:r>
+          </a:p>
+          <a:p>
+            <a:pPr>
+              <a:spcAft>
+                <a:spcPts val="1000"/>
+              </a:spcAft>
+              <a:defRPr sz="1500">
+                <a:solidFill>
+                  <a:srgbClr val="0B0B0B"/>
+                </a:solidFill>
+              </a:defRPr>
+            </a:pPr>
+            <a:r>
+              <a:t>•  Fix: added send_command() to fta_calibration_vcp.py -- writes a command and blocks until that command's OK/ERR reply arrives before returning, guaranteeing the firmware's one-line buffer is empty before the next command is sent.</a:t>
+            </a:r>
+          </a:p>
+        </p:txBody>
+      </p:sp>
+    </p:spTree>
+  </p:cSld>
+  <p:clrMapOvr>
+    <a:masterClrMapping/>
+  </p:clrMapOvr>
+</p:sld>
+</file>
+
+<file path=ppt/slides/slide22.xml><?xml version="1.0" encoding="utf-8"?>
+<p:sld xmlns:a="http://schemas.openxmlformats.org/drawingml/2006/main" xmlns:p="http://schemas.openxmlformats.org/presentationml/2006/main" xmlns:r="http://schemas.openxmlformats.org/officeDocument/2006/relationships">
+  <p:cSld>
+    <p:spTree>
+      <p:nvGrpSpPr>
+        <p:cNvPr id="1" name=""/>
+        <p:cNvGrpSpPr/>
+        <p:nvPr/>
+      </p:nvGrpSpPr>
+      <p:grpSpPr/>
+      <p:sp>
+        <p:nvSpPr>
+          <p:cNvPr id="2" name="TextBox 1"/>
+          <p:cNvSpPr txBox="1"/>
+          <p:nvPr/>
+        </p:nvSpPr>
+        <p:spPr>
+          <a:xfrm>
+            <a:off x="548640" y="365760"/>
+            <a:ext cx="11064240" cy="914400"/>
+          </a:xfrm>
+          <a:prstGeom prst="rect">
+            <a:avLst/>
+          </a:prstGeom>
+          <a:noFill/>
+        </p:spPr>
+        <p:txBody>
+          <a:bodyPr wrap="square">
+            <a:spAutoFit/>
+          </a:bodyPr>
+          <a:lstStyle/>
+          <a:p>
+            <a:pPr>
+              <a:defRPr sz="2800" b="1">
+                <a:solidFill>
+                  <a:srgbClr val="0B0B0B"/>
+                </a:solidFill>
+              </a:defRPr>
+            </a:pPr>
+            <a:r>
+              <a:t>The grid mesh before and after the fix</a:t>
+            </a:r>
+          </a:p>
+          <a:p>
+            <a:pPr>
+              <a:defRPr sz="1400">
+                <a:solidFill>
+                  <a:srgbClr val="52514E"/>
+                </a:solidFill>
+              </a:defRPr>
+            </a:pPr>
+            <a:r>
+              <a:t>Same 200-3800 / step-300 grid, drawn directly in centroid (pixel) space -- rows share dac_y, columns share dac_x</a:t>
+            </a:r>
+          </a:p>
+        </p:txBody>
+      </p:sp>
+      <p:pic>
+        <p:nvPicPr>
+          <p:cNvPr id="3" name="Picture 2" descr="fta_calibration_grid_mesh_fullframe.png"/>
+          <p:cNvPicPr>
+            <a:picLocks noChangeAspect="1"/>
+          </p:cNvPicPr>
+          <p:nvPr/>
+        </p:nvPicPr>
+        <p:blipFill>
+          <a:blip r:embed="rId2"/>
+          <a:stretch>
+            <a:fillRect/>
+          </a:stretch>
+        </p:blipFill>
+        <p:spPr>
+          <a:xfrm>
+            <a:off x="137160" y="1188720"/>
+            <a:ext cx="4356847" cy="4114800"/>
+          </a:xfrm>
+          <a:prstGeom prst="rect">
+            <a:avLst/>
+          </a:prstGeom>
+        </p:spPr>
+      </p:pic>
+      <p:pic>
+        <p:nvPicPr>
+          <p:cNvPr id="4" name="Picture 3" descr="fta_calibration_grid_mesh_fullframe_fixed.png"/>
+          <p:cNvPicPr>
+            <a:picLocks noChangeAspect="1"/>
+          </p:cNvPicPr>
+          <p:nvPr/>
+        </p:nvPicPr>
+        <p:blipFill>
+          <a:blip r:embed="rId3"/>
+          <a:stretch>
+            <a:fillRect/>
+          </a:stretch>
+        </p:blipFill>
+        <p:spPr>
+          <a:xfrm>
+            <a:off x="6172200" y="1188720"/>
+            <a:ext cx="4356847" cy="4114800"/>
+          </a:xfrm>
+          <a:prstGeom prst="rect">
+            <a:avLst/>
+          </a:prstGeom>
+        </p:spPr>
+      </p:pic>
+      <p:sp>
+        <p:nvSpPr>
+          <p:cNvPr id="5" name="TextBox 4"/>
+          <p:cNvSpPr txBox="1"/>
+          <p:nvPr/>
+        </p:nvSpPr>
+        <p:spPr>
+          <a:xfrm>
+            <a:off x="334450944000" y="5016764160000"/>
+            <a:ext cx="10451592000000" cy="1086965568000"/>
+          </a:xfrm>
+          <a:prstGeom prst="rect">
+            <a:avLst/>
+          </a:prstGeom>
+          <a:noFill/>
+        </p:spPr>
+        <p:txBody>
+          <a:bodyPr wrap="square">
+            <a:spAutoFit/>
+          </a:bodyPr>
+          <a:lstStyle/>
+          <a:p>
+            <a:pPr>
+              <a:spcAft>
+                <a:spcPts val="1000"/>
+              </a:spcAft>
+              <a:defRPr sz="1300">
+                <a:solidFill>
+                  <a:srgbClr val="0B0B0B"/>
+                </a:solidFill>
+              </a:defRPr>
+            </a:pPr>
+            <a:r>
+              <a:t>•  LEFT (buggy): near-degenerate sliver, 2x2 gain-block determinant ~0.0004 -- dac_y barely moves the centroid independent of dac_x.</a:t>
+            </a:r>
+          </a:p>
+          <a:p>
+            <a:pPr>
+              <a:spcAft>
+                <a:spcPts val="1000"/>
+              </a:spcAft>
+              <a:defRPr sz="1300">
+                <a:solidFill>
+                  <a:srgbClr val="0B0B0B"/>
+                </a:solidFill>
+              </a:defRPr>
+            </a:pPr>
+            <a:r>
+              <a:t>•  RIGHT (fixed): clean, evenly-spaced parallelogram, determinant ~0.01 (25-30x larger) -- both axes genuinely independent, rotated relative to camera x/y (consistent with the ~-150° motion-axis angle already found from the sine-tracking rotated view, slides 10/19/20 -- those were never affected by this bug since they only ever send set_x in a loop).</a:t>
+            </a:r>
+          </a:p>
+        </p:txBody>
+      </p:sp>
+    </p:spTree>
+  </p:cSld>
+  <p:clrMapOvr>
+    <a:masterClrMapping/>
+  </p:clrMapOvr>
+</p:sld>
+</file>
+
+<file path=ppt/slides/slide23.xml><?xml version="1.0" encoding="utf-8"?>
+<p:sld xmlns:a="http://schemas.openxmlformats.org/drawingml/2006/main" xmlns:p="http://schemas.openxmlformats.org/presentationml/2006/main" xmlns:r="http://schemas.openxmlformats.org/officeDocument/2006/relationships">
+  <p:cSld>
+    <p:spTree>
+      <p:nvGrpSpPr>
+        <p:cNvPr id="1" name=""/>
+        <p:cNvGrpSpPr/>
+        <p:nvPr/>
+      </p:nvGrpSpPr>
+      <p:grpSpPr/>
+      <p:sp>
+        <p:nvSpPr>
+          <p:cNvPr id="2" name="TextBox 1"/>
+          <p:cNvSpPr txBox="1"/>
+          <p:nvPr/>
+        </p:nvSpPr>
+        <p:spPr>
+          <a:xfrm>
+            <a:off x="548640" y="365760"/>
+            <a:ext cx="11064240" cy="914400"/>
+          </a:xfrm>
+          <a:prstGeom prst="rect">
+            <a:avLst/>
+          </a:prstGeom>
+          <a:noFill/>
+        </p:spPr>
+        <p:txBody>
+          <a:bodyPr wrap="square">
+            <a:spAutoFit/>
+          </a:bodyPr>
+          <a:lstStyle/>
+          <a:p>
+            <a:pPr>
+              <a:defRPr sz="2800" b="1">
+                <a:solidFill>
+                  <a:srgbClr val="0B0B0B"/>
+                </a:solidFill>
+              </a:defRPr>
+            </a:pPr>
+            <a:r>
+              <a:t>Corrected travel-range analysis: no Y-axis saturation</a:t>
+            </a:r>
+          </a:p>
+          <a:p>
+            <a:pPr>
+              <a:defRPr sz="1400">
+                <a:solidFill>
+                  <a:srgbClr val="52514E"/>
+                </a:solidFill>
+              </a:defRPr>
+            </a:pPr>
+            <a:r>
+              <a:t>Same plot as slide 18, re-run on the fixed calibration data -- cy now declines smoothly across the full range, mirroring cx</a:t>
+            </a:r>
+          </a:p>
+        </p:txBody>
+      </p:sp>
+      <p:pic>
+        <p:nvPicPr>
+          <p:cNvPr id="3" name="Picture 2" descr="fta_travel_range_analysis_fullframe_fixed_longdwell.png"/>
+          <p:cNvPicPr>
+            <a:picLocks noChangeAspect="1"/>
+          </p:cNvPicPr>
+          <p:nvPr/>
+        </p:nvPicPr>
+        <p:blipFill>
+          <a:blip r:embed="rId2"/>
+          <a:stretch>
+            <a:fillRect/>
+          </a:stretch>
+        </p:blipFill>
+        <p:spPr>
+          <a:xfrm>
+            <a:off x="3337560" y="1188720"/>
+            <a:ext cx="5745479" cy="3977639"/>
+          </a:xfrm>
+          <a:prstGeom prst="rect">
+            <a:avLst/>
+          </a:prstGeom>
+        </p:spPr>
+      </p:pic>
+      <p:sp>
+        <p:nvSpPr>
+          <p:cNvPr id="4" name="TextBox 3"/>
+          <p:cNvSpPr txBox="1"/>
+          <p:nvPr/>
+        </p:nvSpPr>
+        <p:spPr>
+          <a:xfrm>
+            <a:off x="418063680000" y="4849538688000"/>
+            <a:ext cx="10284366528000" cy="1254191040000"/>
+          </a:xfrm>
+          <a:prstGeom prst="rect">
+            <a:avLst/>
+          </a:prstGeom>
+          <a:noFill/>
+        </p:spPr>
+        <p:txBody>
+          <a:bodyPr wrap="square">
+            <a:spAutoFit/>
+          </a:bodyPr>
+          <a:lstStyle/>
+          <a:p>
+            <a:pPr>
+              <a:spcAft>
+                <a:spcPts val="1000"/>
+              </a:spcAft>
+              <a:defRPr sz="1300">
+                <a:solidFill>
+                  <a:srgbClr val="0B0B0B"/>
+                </a:solidFill>
+              </a:defRPr>
+            </a:pPr>
+            <a:r>
+              <a:t>•  Y axis now tracks dac_y smoothly across the entire 200-3800 range, just like X -- no flattening past ~500 counts.</a:t>
+            </a:r>
+          </a:p>
+          <a:p>
+            <a:pPr>
+              <a:spcAft>
+                <a:spcPts val="1000"/>
+              </a:spcAft>
+              <a:defRPr sz="1300">
+                <a:solidFill>
+                  <a:srgbClr val="0B0B0B"/>
+                </a:solidFill>
+              </a:defRPr>
+            </a:pPr>
+            <a:r>
+              <a:t>•  Slide 18's "Y's real useful travel is only DAC 200-500/800" finding and its "restrict Y calibration to that range" recommendation are both retracted.</a:t>
+            </a:r>
+          </a:p>
+          <a:p>
+            <a:pPr>
+              <a:spcAft>
+                <a:spcPts val="1000"/>
+              </a:spcAft>
+              <a:defRPr sz="1300">
+                <a:solidFill>
+                  <a:srgbClr val="0B0B0B"/>
+                </a:solidFill>
+              </a:defRPr>
+            </a:pPr>
+            <a:r>
+              <a:t>•  Confirmed at both normal dwell (0.3s settle/0.15s capture) and ~4x longer dwell (1.2s/0.6s, to rule out settling noise) -- same result both times.</a:t>
+            </a:r>
+          </a:p>
+        </p:txBody>
+      </p:sp>
     </p:spTree>
   </p:cSld>
   <p:clrMapOvr>
